--- a/Саратовская_область_презентация_СПбГУ.pptx
+++ b/Саратовская_область_презентация_СПбГУ.pptx
@@ -1768,7 +1768,7 @@
           <a:lstStyle/>
           <a:p>
             <a:r>
-              <a:t>Откуда взята общая сводка: это официальный сборник Росстата, один источник на все показатели региона. Из 823 таблиц автоматически отобраны 397 со строкой региона — это гарантирует, что числа не переписаны вручную.</a:t>
+              <a:t>Откуда взята общая сводка: это официальный сборник Росстата, один источник на все показатели региона. Из 823 таблиц автоматически отобраны 476 со строкой региона — это гарантирует, что числа не переписаны вручную.</a:t>
             </a:r>
           </a:p>
         </p:txBody>
@@ -11128,7 +11128,7 @@
                 </a:solidFill>
                 <a:latin typeface="Open Sans"/>
               </a:rPr>
-              <a:t>•  Полнота: зарплата указана у 100% вакансий, координаты — у 96,1%.</a:t>
+              <a:t>•  Полнота: зарплата указана у 99,8% вакансий, координаты — у 96,1%.</a:t>
             </a:r>
           </a:p>
           <a:p>
@@ -11298,7 +11298,7 @@
                           </a:solidFill>
                           <a:latin typeface="Open Sans"/>
                         </a:rPr>
-                        <a:t>28 468</a:t>
+                        <a:t>28 500</a:t>
                       </a:r>
                     </a:p>
                   </a:txBody>
@@ -11390,7 +11390,7 @@
                           </a:solidFill>
                           <a:latin typeface="Open Sans"/>
                         </a:rPr>
-                        <a:t>45 262</a:t>
+                        <a:t>45 349</a:t>
                       </a:r>
                     </a:p>
                   </a:txBody>
@@ -15092,7 +15092,7 @@
                 </a:solidFill>
                 <a:latin typeface="Open Sans"/>
               </a:rPr>
-              <a:t>Из 823 таблиц сборника скриптом отобраны 397, содержащих строку «Саратовская область».</a:t>
+              <a:t>Из 823 таблиц сборника скриптом отобраны 476, содержащих строку «Саратовская область».</a:t>
             </a:r>
           </a:p>
         </p:txBody>
@@ -16239,7 +16239,7 @@
                           </a:solidFill>
                           <a:latin typeface="Open Sans"/>
                         </a:rPr>
-                        <a:t>397 таблиц сборника, 2 432 объекта OSM с привязкой к городам</a:t>
+                        <a:t>476 таблиц сборника, 2 432 объекта OSM с привязкой к городам</a:t>
                       </a:r>
                     </a:p>
                   </a:txBody>
@@ -18934,7 +18934,7 @@
                           </a:solidFill>
                           <a:latin typeface="Open Sans"/>
                         </a:rPr>
-                        <a:t>397 таблиц, из них 9 банковских</a:t>
+                        <a:t>476 таблиц сборника, из них 39 в разделе 20</a:t>
                       </a:r>
                     </a:p>
                   </a:txBody>

--- a/Саратовская_область_презентация_СПбГУ.pptx
+++ b/Саратовская_область_презентация_СПбГУ.pptx
@@ -9497,7 +9497,7 @@
         </p:nvGraphicFramePr>
         <p:xfrm>
           <a:off x="566928" y="1371600"/>
-          <a:ext cx="11018519" cy="3968496"/>
+          <a:ext cx="11018519" cy="3200400"/>
         </p:xfrm>
         <a:graphic>
           <a:graphicData uri="http://schemas.openxmlformats.org/drawingml/2006/table">
@@ -9510,7 +9510,7 @@
                 <a:gridCol w="2644444"/>
                 <a:gridCol w="5068519"/>
               </a:tblGrid>
-              <a:tr h="566928">
+              <a:tr h="457200">
                 <a:tc>
                   <a:txBody>
                     <a:bodyPr/>
@@ -9578,7 +9578,7 @@
                   </a:tcPr>
                 </a:tc>
               </a:tr>
-              <a:tr h="566928">
+              <a:tr h="457200">
                 <a:tc>
                   <a:txBody>
                     <a:bodyPr/>
@@ -9646,7 +9646,7 @@
                   </a:tcPr>
                 </a:tc>
               </a:tr>
-              <a:tr h="566928">
+              <a:tr h="457200">
                 <a:tc>
                   <a:txBody>
                     <a:bodyPr/>
@@ -9714,7 +9714,7 @@
                   </a:tcPr>
                 </a:tc>
               </a:tr>
-              <a:tr h="566928">
+              <a:tr h="457200">
                 <a:tc>
                   <a:txBody>
                     <a:bodyPr/>
@@ -9782,7 +9782,7 @@
                   </a:tcPr>
                 </a:tc>
               </a:tr>
-              <a:tr h="566928">
+              <a:tr h="457200">
                 <a:tc>
                   <a:txBody>
                     <a:bodyPr/>
@@ -9850,7 +9850,7 @@
                   </a:tcPr>
                 </a:tc>
               </a:tr>
-              <a:tr h="566928">
+              <a:tr h="457200">
                 <a:tc>
                   <a:txBody>
                     <a:bodyPr/>
@@ -9918,7 +9918,7 @@
                   </a:tcPr>
                 </a:tc>
               </a:tr>
-              <a:tr h="566928">
+              <a:tr h="457200">
                 <a:tc>
                   <a:txBody>
                     <a:bodyPr/>
@@ -11003,7 +11003,7 @@
         </p:nvSpPr>
         <p:spPr>
           <a:xfrm>
-            <a:off x="566928" y="3200400"/>
+            <a:off x="566928" y="3611880"/>
             <a:ext cx="11018520" cy="4754880"/>
           </a:xfrm>
           <a:prstGeom prst="rect">
@@ -11126,7 +11126,7 @@
               </a:lnSpc>
             </a:pPr>
             <a:r>
-              <a:rPr sz="1050" b="1">
+              <a:rPr sz="1050" b="0">
                 <a:solidFill>
                   <a:srgbClr val="923826"/>
                 </a:solidFill>
@@ -11303,7 +11303,7 @@
         </p:nvGraphicFramePr>
         <p:xfrm>
           <a:off x="566928" y="1371600"/>
-          <a:ext cx="11018519" cy="3968496"/>
+          <a:ext cx="11018519" cy="3200400"/>
         </p:xfrm>
         <a:graphic>
           <a:graphicData uri="http://schemas.openxmlformats.org/drawingml/2006/table">
@@ -11316,7 +11316,7 @@
                 <a:gridCol w="2864815"/>
                 <a:gridCol w="5068519"/>
               </a:tblGrid>
-              <a:tr h="566928">
+              <a:tr h="457200">
                 <a:tc>
                   <a:txBody>
                     <a:bodyPr/>
@@ -11384,7 +11384,7 @@
                   </a:tcPr>
                 </a:tc>
               </a:tr>
-              <a:tr h="566928">
+              <a:tr h="457200">
                 <a:tc>
                   <a:txBody>
                     <a:bodyPr/>
@@ -11452,7 +11452,7 @@
                   </a:tcPr>
                 </a:tc>
               </a:tr>
-              <a:tr h="566928">
+              <a:tr h="457200">
                 <a:tc>
                   <a:txBody>
                     <a:bodyPr/>
@@ -11520,7 +11520,7 @@
                   </a:tcPr>
                 </a:tc>
               </a:tr>
-              <a:tr h="566928">
+              <a:tr h="457200">
                 <a:tc>
                   <a:txBody>
                     <a:bodyPr/>
@@ -11588,7 +11588,7 @@
                   </a:tcPr>
                 </a:tc>
               </a:tr>
-              <a:tr h="566928">
+              <a:tr h="457200">
                 <a:tc>
                   <a:txBody>
                     <a:bodyPr/>
@@ -11656,7 +11656,7 @@
                   </a:tcPr>
                 </a:tc>
               </a:tr>
-              <a:tr h="566928">
+              <a:tr h="457200">
                 <a:tc>
                   <a:txBody>
                     <a:bodyPr/>
@@ -11724,7 +11724,7 @@
                   </a:tcPr>
                 </a:tc>
               </a:tr>
-              <a:tr h="566928">
+              <a:tr h="457200">
                 <a:tc>
                   <a:txBody>
                     <a:bodyPr/>
@@ -13817,7 +13817,7 @@
         </p:nvGraphicFramePr>
         <p:xfrm>
           <a:off x="566928" y="1371600"/>
-          <a:ext cx="11018519" cy="3968496"/>
+          <a:ext cx="11018519" cy="3200400"/>
         </p:xfrm>
         <a:graphic>
           <a:graphicData uri="http://schemas.openxmlformats.org/drawingml/2006/table">
@@ -13830,7 +13830,7 @@
                 <a:gridCol w="2975000"/>
                 <a:gridCol w="4958334"/>
               </a:tblGrid>
-              <a:tr h="566928">
+              <a:tr h="457200">
                 <a:tc>
                   <a:txBody>
                     <a:bodyPr/>
@@ -13898,7 +13898,7 @@
                   </a:tcPr>
                 </a:tc>
               </a:tr>
-              <a:tr h="566928">
+              <a:tr h="457200">
                 <a:tc>
                   <a:txBody>
                     <a:bodyPr/>
@@ -13966,7 +13966,7 @@
                   </a:tcPr>
                 </a:tc>
               </a:tr>
-              <a:tr h="566928">
+              <a:tr h="457200">
                 <a:tc>
                   <a:txBody>
                     <a:bodyPr/>
@@ -14034,7 +14034,7 @@
                   </a:tcPr>
                 </a:tc>
               </a:tr>
-              <a:tr h="566928">
+              <a:tr h="457200">
                 <a:tc>
                   <a:txBody>
                     <a:bodyPr/>
@@ -14102,7 +14102,7 @@
                   </a:tcPr>
                 </a:tc>
               </a:tr>
-              <a:tr h="566928">
+              <a:tr h="457200">
                 <a:tc>
                   <a:txBody>
                     <a:bodyPr/>
@@ -14170,7 +14170,7 @@
                   </a:tcPr>
                 </a:tc>
               </a:tr>
-              <a:tr h="566928">
+              <a:tr h="457200">
                 <a:tc>
                   <a:txBody>
                     <a:bodyPr/>
@@ -14238,7 +14238,7 @@
                   </a:tcPr>
                 </a:tc>
               </a:tr>
-              <a:tr h="566928">
+              <a:tr h="457200">
                 <a:tc>
                   <a:txBody>
                     <a:bodyPr/>
@@ -15331,7 +15331,7 @@
               </a:lnSpc>
             </a:pPr>
             <a:r>
-              <a:rPr sz="1150" b="1">
+              <a:rPr sz="1150" b="0">
                 <a:solidFill>
                   <a:srgbClr val="923826"/>
                 </a:solidFill>
@@ -16821,7 +16821,7 @@
         </p:nvSpPr>
         <p:spPr>
           <a:xfrm>
-            <a:off x="566928" y="3749039"/>
+            <a:off x="566928" y="4343400"/>
             <a:ext cx="11018520" cy="822960"/>
           </a:xfrm>
           <a:prstGeom prst="rect">
@@ -16841,7 +16841,7 @@
               </a:lnSpc>
             </a:pPr>
             <a:r>
-              <a:rPr sz="1150" b="1">
+              <a:rPr sz="1150" b="0">
                 <a:solidFill>
                   <a:srgbClr val="923826"/>
                 </a:solidFill>
@@ -16860,8 +16860,8 @@
         </p:nvSpPr>
         <p:spPr>
           <a:xfrm>
-            <a:off x="566928" y="4709160"/>
-            <a:ext cx="11018520" cy="1097280"/>
+            <a:off x="566928" y="5257800"/>
+            <a:ext cx="11018520" cy="914400"/>
           </a:xfrm>
           <a:prstGeom prst="rect">
             <a:avLst/>
@@ -18053,7 +18053,7 @@
         </p:nvSpPr>
         <p:spPr>
           <a:xfrm>
-            <a:off x="566928" y="3977639"/>
+            <a:off x="566928" y="4480560"/>
             <a:ext cx="11018520" cy="731520"/>
           </a:xfrm>
           <a:prstGeom prst="rect">
@@ -18092,7 +18092,7 @@
         </p:nvSpPr>
         <p:spPr>
           <a:xfrm>
-            <a:off x="566928" y="4846320"/>
+            <a:off x="566928" y="5303520"/>
             <a:ext cx="11018520" cy="822960"/>
           </a:xfrm>
           <a:prstGeom prst="rect">
@@ -18112,7 +18112,7 @@
               </a:lnSpc>
             </a:pPr>
             <a:r>
-              <a:rPr sz="1150" b="1">
+              <a:rPr sz="1150" b="0">
                 <a:solidFill>
                   <a:srgbClr val="923826"/>
                 </a:solidFill>
@@ -18307,7 +18307,7 @@
               </a:lnSpc>
             </a:pPr>
             <a:r>
-              <a:rPr sz="1250" b="1">
+              <a:rPr sz="1250" b="0">
                 <a:solidFill>
                   <a:srgbClr val="923826"/>
                 </a:solidFill>
@@ -19483,7 +19483,7 @@
         </p:nvSpPr>
         <p:spPr>
           <a:xfrm>
-            <a:off x="566928" y="4206240"/>
+            <a:off x="566928" y="4709160"/>
             <a:ext cx="11018520" cy="822960"/>
           </a:xfrm>
           <a:prstGeom prst="rect">
@@ -19522,7 +19522,7 @@
         </p:nvSpPr>
         <p:spPr>
           <a:xfrm>
-            <a:off x="566928" y="5074920"/>
+            <a:off x="566928" y="5532120"/>
             <a:ext cx="11018520" cy="731520"/>
           </a:xfrm>
           <a:prstGeom prst="rect">
@@ -19542,7 +19542,7 @@
               </a:lnSpc>
             </a:pPr>
             <a:r>
-              <a:rPr sz="1150" b="1">
+              <a:rPr sz="1150" b="0">
                 <a:solidFill>
                   <a:srgbClr val="923826"/>
                 </a:solidFill>

--- a/Саратовская_область_презентация_СПбГУ.pptx
+++ b/Саратовская_область_презентация_СПбГУ.pptx
@@ -9517,7 +9517,7 @@
                     <a:lstStyle/>
                     <a:p>
                       <a:r>
-                        <a:rPr sz="950" b="1">
+                        <a:rPr sz="950" b="0">
                           <a:solidFill>
                             <a:srgbClr val="FFFFFF"/>
                           </a:solidFill>
@@ -9539,7 +9539,7 @@
                     <a:lstStyle/>
                     <a:p>
                       <a:r>
-                        <a:rPr sz="950" b="1">
+                        <a:rPr sz="950" b="0">
                           <a:solidFill>
                             <a:srgbClr val="FFFFFF"/>
                           </a:solidFill>
@@ -9561,7 +9561,7 @@
                     <a:lstStyle/>
                     <a:p>
                       <a:r>
-                        <a:rPr sz="950" b="1">
+                        <a:rPr sz="950" b="0">
                           <a:solidFill>
                             <a:srgbClr val="FFFFFF"/>
                           </a:solidFill>
@@ -10316,7 +10316,7 @@
                     <a:lstStyle/>
                     <a:p>
                       <a:r>
-                        <a:rPr sz="1050" b="1">
+                        <a:rPr sz="1050" b="0">
                           <a:solidFill>
                             <a:srgbClr val="FFFFFF"/>
                           </a:solidFill>
@@ -10338,7 +10338,7 @@
                     <a:lstStyle/>
                     <a:p>
                       <a:r>
-                        <a:rPr sz="1050" b="1">
+                        <a:rPr sz="1050" b="0">
                           <a:solidFill>
                             <a:srgbClr val="FFFFFF"/>
                           </a:solidFill>
@@ -10360,7 +10360,7 @@
                     <a:lstStyle/>
                     <a:p>
                       <a:r>
-                        <a:rPr sz="1050" b="1">
+                        <a:rPr sz="1050" b="0">
                           <a:solidFill>
                             <a:srgbClr val="FFFFFF"/>
                           </a:solidFill>
@@ -10548,7 +10548,7 @@
                     <a:lstStyle/>
                     <a:p>
                       <a:r>
-                        <a:rPr sz="1050" b="1">
+                        <a:rPr sz="1050" b="0">
                           <a:solidFill>
                             <a:srgbClr val="FFFFFF"/>
                           </a:solidFill>
@@ -10570,7 +10570,7 @@
                     <a:lstStyle/>
                     <a:p>
                       <a:r>
-                        <a:rPr sz="1050" b="1">
+                        <a:rPr sz="1050" b="0">
                           <a:solidFill>
                             <a:srgbClr val="FFFFFF"/>
                           </a:solidFill>
@@ -10592,7 +10592,7 @@
                     <a:lstStyle/>
                     <a:p>
                       <a:r>
-                        <a:rPr sz="1050" b="1">
+                        <a:rPr sz="1050" b="0">
                           <a:solidFill>
                             <a:srgbClr val="FFFFFF"/>
                           </a:solidFill>
@@ -10614,7 +10614,7 @@
                     <a:lstStyle/>
                     <a:p>
                       <a:r>
-                        <a:rPr sz="1050" b="1">
+                        <a:rPr sz="1050" b="0">
                           <a:solidFill>
                             <a:srgbClr val="FFFFFF"/>
                           </a:solidFill>
@@ -11323,7 +11323,7 @@
                     <a:lstStyle/>
                     <a:p>
                       <a:r>
-                        <a:rPr sz="950" b="1">
+                        <a:rPr sz="950" b="0">
                           <a:solidFill>
                             <a:srgbClr val="FFFFFF"/>
                           </a:solidFill>
@@ -11345,7 +11345,7 @@
                     <a:lstStyle/>
                     <a:p>
                       <a:r>
-                        <a:rPr sz="950" b="1">
+                        <a:rPr sz="950" b="0">
                           <a:solidFill>
                             <a:srgbClr val="FFFFFF"/>
                           </a:solidFill>
@@ -11367,7 +11367,7 @@
                     <a:lstStyle/>
                     <a:p>
                       <a:r>
-                        <a:rPr sz="950" b="1">
+                        <a:rPr sz="950" b="0">
                           <a:solidFill>
                             <a:srgbClr val="FFFFFF"/>
                           </a:solidFill>
@@ -12795,7 +12795,7 @@
                     <a:lstStyle/>
                     <a:p>
                       <a:r>
-                        <a:rPr sz="950" b="1">
+                        <a:rPr sz="950" b="0">
                           <a:solidFill>
                             <a:srgbClr val="FFFFFF"/>
                           </a:solidFill>
@@ -12817,7 +12817,7 @@
                     <a:lstStyle/>
                     <a:p>
                       <a:r>
-                        <a:rPr sz="950" b="1">
+                        <a:rPr sz="950" b="0">
                           <a:solidFill>
                             <a:srgbClr val="FFFFFF"/>
                           </a:solidFill>
@@ -12839,7 +12839,7 @@
                     <a:lstStyle/>
                     <a:p>
                       <a:r>
-                        <a:rPr sz="950" b="1">
+                        <a:rPr sz="950" b="0">
                           <a:solidFill>
                             <a:srgbClr val="FFFFFF"/>
                           </a:solidFill>
@@ -12861,7 +12861,7 @@
                     <a:lstStyle/>
                     <a:p>
                       <a:r>
-                        <a:rPr sz="950" b="1">
+                        <a:rPr sz="950" b="0">
                           <a:solidFill>
                             <a:srgbClr val="FFFFFF"/>
                           </a:solidFill>
@@ -12883,7 +12883,7 @@
                     <a:lstStyle/>
                     <a:p>
                       <a:r>
-                        <a:rPr sz="950" b="1">
+                        <a:rPr sz="950" b="0">
                           <a:solidFill>
                             <a:srgbClr val="FFFFFF"/>
                           </a:solidFill>
@@ -12905,7 +12905,7 @@
                     <a:lstStyle/>
                     <a:p>
                       <a:r>
-                        <a:rPr sz="950" b="1">
+                        <a:rPr sz="950" b="0">
                           <a:solidFill>
                             <a:srgbClr val="FFFFFF"/>
                           </a:solidFill>
@@ -13837,7 +13837,7 @@
                     <a:lstStyle/>
                     <a:p>
                       <a:r>
-                        <a:rPr sz="950" b="1">
+                        <a:rPr sz="950" b="0">
                           <a:solidFill>
                             <a:srgbClr val="FFFFFF"/>
                           </a:solidFill>
@@ -13859,7 +13859,7 @@
                     <a:lstStyle/>
                     <a:p>
                       <a:r>
-                        <a:rPr sz="950" b="1">
+                        <a:rPr sz="950" b="0">
                           <a:solidFill>
                             <a:srgbClr val="FFFFFF"/>
                           </a:solidFill>
@@ -13881,7 +13881,7 @@
                     <a:lstStyle/>
                     <a:p>
                       <a:r>
-                        <a:rPr sz="950" b="1">
+                        <a:rPr sz="950" b="0">
                           <a:solidFill>
                             <a:srgbClr val="FFFFFF"/>
                           </a:solidFill>
@@ -14652,7 +14652,7 @@
                     <a:lstStyle/>
                     <a:p>
                       <a:r>
-                        <a:rPr sz="1000" b="1">
+                        <a:rPr sz="1000" b="0">
                           <a:solidFill>
                             <a:srgbClr val="FFFFFF"/>
                           </a:solidFill>
@@ -14674,7 +14674,7 @@
                     <a:lstStyle/>
                     <a:p>
                       <a:r>
-                        <a:rPr sz="1000" b="1">
+                        <a:rPr sz="1000" b="0">
                           <a:solidFill>
                             <a:srgbClr val="FFFFFF"/>
                           </a:solidFill>
@@ -14696,7 +14696,7 @@
                     <a:lstStyle/>
                     <a:p>
                       <a:r>
-                        <a:rPr sz="1000" b="1">
+                        <a:rPr sz="1000" b="0">
                           <a:solidFill>
                             <a:srgbClr val="FFFFFF"/>
                           </a:solidFill>
@@ -14950,7 +14950,7 @@
                     <a:lstStyle/>
                     <a:p>
                       <a:r>
-                        <a:rPr sz="1000" b="1">
+                        <a:rPr sz="1000" b="0">
                           <a:solidFill>
                             <a:srgbClr val="FFFFFF"/>
                           </a:solidFill>
@@ -14972,7 +14972,7 @@
                     <a:lstStyle/>
                     <a:p>
                       <a:r>
-                        <a:rPr sz="1000" b="1">
+                        <a:rPr sz="1000" b="0">
                           <a:solidFill>
                             <a:srgbClr val="FFFFFF"/>
                           </a:solidFill>
@@ -15758,7 +15758,7 @@
                     <a:lstStyle/>
                     <a:p>
                       <a:r>
-                        <a:rPr sz="900" b="1">
+                        <a:rPr sz="900" b="0">
                           <a:solidFill>
                             <a:srgbClr val="FFFFFF"/>
                           </a:solidFill>
@@ -15780,7 +15780,7 @@
                     <a:lstStyle/>
                     <a:p>
                       <a:r>
-                        <a:rPr sz="900" b="1">
+                        <a:rPr sz="900" b="0">
                           <a:solidFill>
                             <a:srgbClr val="FFFFFF"/>
                           </a:solidFill>
@@ -15802,7 +15802,7 @@
                     <a:lstStyle/>
                     <a:p>
                       <a:r>
-                        <a:rPr sz="900" b="1">
+                        <a:rPr sz="900" b="0">
                           <a:solidFill>
                             <a:srgbClr val="FFFFFF"/>
                           </a:solidFill>
@@ -15824,7 +15824,7 @@
                     <a:lstStyle/>
                     <a:p>
                       <a:r>
-                        <a:rPr sz="900" b="1">
+                        <a:rPr sz="900" b="0">
                           <a:solidFill>
                             <a:srgbClr val="FFFFFF"/>
                           </a:solidFill>
@@ -16456,7 +16456,7 @@
                     <a:lstStyle/>
                     <a:p>
                       <a:r>
-                        <a:rPr sz="950" b="1">
+                        <a:rPr sz="950" b="0">
                           <a:solidFill>
                             <a:srgbClr val="FFFFFF"/>
                           </a:solidFill>
@@ -16478,7 +16478,7 @@
                     <a:lstStyle/>
                     <a:p>
                       <a:r>
-                        <a:rPr sz="950" b="1">
+                        <a:rPr sz="950" b="0">
                           <a:solidFill>
                             <a:srgbClr val="FFFFFF"/>
                           </a:solidFill>
@@ -16500,7 +16500,7 @@
                     <a:lstStyle/>
                     <a:p>
                       <a:r>
-                        <a:rPr sz="950" b="1">
+                        <a:rPr sz="950" b="0">
                           <a:solidFill>
                             <a:srgbClr val="FFFFFF"/>
                           </a:solidFill>
@@ -16522,7 +16522,7 @@
                     <a:lstStyle/>
                     <a:p>
                       <a:r>
-                        <a:rPr sz="950" b="1">
+                        <a:rPr sz="950" b="0">
                           <a:solidFill>
                             <a:srgbClr val="FFFFFF"/>
                           </a:solidFill>
@@ -17698,7 +17698,7 @@
                     <a:lstStyle/>
                     <a:p>
                       <a:r>
-                        <a:rPr sz="1000" b="1">
+                        <a:rPr sz="1000" b="0">
                           <a:solidFill>
                             <a:srgbClr val="FFFFFF"/>
                           </a:solidFill>
@@ -17720,7 +17720,7 @@
                     <a:lstStyle/>
                     <a:p>
                       <a:r>
-                        <a:rPr sz="1000" b="1">
+                        <a:rPr sz="1000" b="0">
                           <a:solidFill>
                             <a:srgbClr val="FFFFFF"/>
                           </a:solidFill>
@@ -17742,7 +17742,7 @@
                     <a:lstStyle/>
                     <a:p>
                       <a:r>
-                        <a:rPr sz="1000" b="1">
+                        <a:rPr sz="1000" b="0">
                           <a:solidFill>
                             <a:srgbClr val="FFFFFF"/>
                           </a:solidFill>
@@ -18938,7 +18938,7 @@
                     <a:lstStyle/>
                     <a:p>
                       <a:r>
-                        <a:rPr sz="1000" b="1">
+                        <a:rPr sz="1000" b="0">
                           <a:solidFill>
                             <a:srgbClr val="FFFFFF"/>
                           </a:solidFill>
@@ -18960,7 +18960,7 @@
                     <a:lstStyle/>
                     <a:p>
                       <a:r>
-                        <a:rPr sz="1000" b="1">
+                        <a:rPr sz="1000" b="0">
                           <a:solidFill>
                             <a:srgbClr val="FFFFFF"/>
                           </a:solidFill>
@@ -18982,7 +18982,7 @@
                     <a:lstStyle/>
                     <a:p>
                       <a:r>
-                        <a:rPr sz="1000" b="1">
+                        <a:rPr sz="1000" b="0">
                           <a:solidFill>
                             <a:srgbClr val="FFFFFF"/>
                           </a:solidFill>
@@ -19004,7 +19004,7 @@
                     <a:lstStyle/>
                     <a:p>
                       <a:r>
-                        <a:rPr sz="1000" b="1">
+                        <a:rPr sz="1000" b="0">
                           <a:solidFill>
                             <a:srgbClr val="FFFFFF"/>
                           </a:solidFill>

--- a/Саратовская_область_презентация_СПбГУ.pptx
+++ b/Саратовская_область_презентация_СПбГУ.pptx
@@ -9517,7 +9517,7 @@
                     <a:lstStyle/>
                     <a:p>
                       <a:r>
-                        <a:rPr sz="950" b="0">
+                        <a:rPr sz="1050" b="0">
                           <a:solidFill>
                             <a:srgbClr val="FFFFFF"/>
                           </a:solidFill>
@@ -9539,7 +9539,7 @@
                     <a:lstStyle/>
                     <a:p>
                       <a:r>
-                        <a:rPr sz="950" b="0">
+                        <a:rPr sz="1050" b="0">
                           <a:solidFill>
                             <a:srgbClr val="FFFFFF"/>
                           </a:solidFill>
@@ -9561,7 +9561,7 @@
                     <a:lstStyle/>
                     <a:p>
                       <a:r>
-                        <a:rPr sz="950" b="0">
+                        <a:rPr sz="1050" b="0">
                           <a:solidFill>
                             <a:srgbClr val="FFFFFF"/>
                           </a:solidFill>
@@ -9585,7 +9585,7 @@
                     <a:lstStyle/>
                     <a:p>
                       <a:r>
-                        <a:rPr sz="950" b="0">
+                        <a:rPr sz="1050" b="0">
                           <a:solidFill>
                             <a:srgbClr val="181818"/>
                           </a:solidFill>
@@ -9607,7 +9607,7 @@
                     <a:lstStyle/>
                     <a:p>
                       <a:r>
-                        <a:rPr sz="950" b="0">
+                        <a:rPr sz="1050" b="0">
                           <a:solidFill>
                             <a:srgbClr val="181818"/>
                           </a:solidFill>
@@ -9629,7 +9629,7 @@
                     <a:lstStyle/>
                     <a:p>
                       <a:r>
-                        <a:rPr sz="950" b="0">
+                        <a:rPr sz="1050" b="0">
                           <a:solidFill>
                             <a:srgbClr val="181818"/>
                           </a:solidFill>
@@ -9653,7 +9653,7 @@
                     <a:lstStyle/>
                     <a:p>
                       <a:r>
-                        <a:rPr sz="950" b="0">
+                        <a:rPr sz="1050" b="0">
                           <a:solidFill>
                             <a:srgbClr val="181818"/>
                           </a:solidFill>
@@ -9675,7 +9675,7 @@
                     <a:lstStyle/>
                     <a:p>
                       <a:r>
-                        <a:rPr sz="950" b="0">
+                        <a:rPr sz="1050" b="0">
                           <a:solidFill>
                             <a:srgbClr val="181818"/>
                           </a:solidFill>
@@ -9697,7 +9697,7 @@
                     <a:lstStyle/>
                     <a:p>
                       <a:r>
-                        <a:rPr sz="950" b="0">
+                        <a:rPr sz="1050" b="0">
                           <a:solidFill>
                             <a:srgbClr val="181818"/>
                           </a:solidFill>
@@ -9721,7 +9721,7 @@
                     <a:lstStyle/>
                     <a:p>
                       <a:r>
-                        <a:rPr sz="950" b="0">
+                        <a:rPr sz="1050" b="0">
                           <a:solidFill>
                             <a:srgbClr val="181818"/>
                           </a:solidFill>
@@ -9743,7 +9743,7 @@
                     <a:lstStyle/>
                     <a:p>
                       <a:r>
-                        <a:rPr sz="950" b="0">
+                        <a:rPr sz="1050" b="0">
                           <a:solidFill>
                             <a:srgbClr val="181818"/>
                           </a:solidFill>
@@ -9765,7 +9765,7 @@
                     <a:lstStyle/>
                     <a:p>
                       <a:r>
-                        <a:rPr sz="950" b="0">
+                        <a:rPr sz="1050" b="0">
                           <a:solidFill>
                             <a:srgbClr val="181818"/>
                           </a:solidFill>
@@ -9789,7 +9789,7 @@
                     <a:lstStyle/>
                     <a:p>
                       <a:r>
-                        <a:rPr sz="950" b="0">
+                        <a:rPr sz="1050" b="0">
                           <a:solidFill>
                             <a:srgbClr val="181818"/>
                           </a:solidFill>
@@ -9811,7 +9811,7 @@
                     <a:lstStyle/>
                     <a:p>
                       <a:r>
-                        <a:rPr sz="950" b="0">
+                        <a:rPr sz="1050" b="0">
                           <a:solidFill>
                             <a:srgbClr val="181818"/>
                           </a:solidFill>
@@ -9833,7 +9833,7 @@
                     <a:lstStyle/>
                     <a:p>
                       <a:r>
-                        <a:rPr sz="950" b="0">
+                        <a:rPr sz="1050" b="0">
                           <a:solidFill>
                             <a:srgbClr val="181818"/>
                           </a:solidFill>
@@ -9857,7 +9857,7 @@
                     <a:lstStyle/>
                     <a:p>
                       <a:r>
-                        <a:rPr sz="950" b="0">
+                        <a:rPr sz="1050" b="0">
                           <a:solidFill>
                             <a:srgbClr val="181818"/>
                           </a:solidFill>
@@ -9879,7 +9879,7 @@
                     <a:lstStyle/>
                     <a:p>
                       <a:r>
-                        <a:rPr sz="950" b="0">
+                        <a:rPr sz="1050" b="0">
                           <a:solidFill>
                             <a:srgbClr val="181818"/>
                           </a:solidFill>
@@ -9901,7 +9901,7 @@
                     <a:lstStyle/>
                     <a:p>
                       <a:r>
-                        <a:rPr sz="950" b="0">
+                        <a:rPr sz="1050" b="0">
                           <a:solidFill>
                             <a:srgbClr val="181818"/>
                           </a:solidFill>
@@ -9925,7 +9925,7 @@
                     <a:lstStyle/>
                     <a:p>
                       <a:r>
-                        <a:rPr sz="950" b="0">
+                        <a:rPr sz="1050" b="0">
                           <a:solidFill>
                             <a:srgbClr val="181818"/>
                           </a:solidFill>
@@ -9947,7 +9947,7 @@
                     <a:lstStyle/>
                     <a:p>
                       <a:r>
-                        <a:rPr sz="950" b="0">
+                        <a:rPr sz="1050" b="0">
                           <a:solidFill>
                             <a:srgbClr val="181818"/>
                           </a:solidFill>
@@ -9969,7 +9969,7 @@
                     <a:lstStyle/>
                     <a:p>
                       <a:r>
-                        <a:rPr sz="950" b="0">
+                        <a:rPr sz="1050" b="0">
                           <a:solidFill>
                             <a:srgbClr val="181818"/>
                           </a:solidFill>
@@ -9998,8 +9998,8 @@
         </p:nvSpPr>
         <p:spPr>
           <a:xfrm>
-            <a:off x="566928" y="4846320"/>
-            <a:ext cx="11018520" cy="685800"/>
+            <a:off x="566928" y="5029200"/>
+            <a:ext cx="11018520" cy="731520"/>
           </a:xfrm>
           <a:prstGeom prst="roundRect">
             <a:avLst>
@@ -10044,8 +10044,8 @@
         </p:nvSpPr>
         <p:spPr>
           <a:xfrm>
-            <a:off x="704088" y="4937759"/>
-            <a:ext cx="10744200" cy="502920"/>
+            <a:off x="704088" y="5120640"/>
+            <a:ext cx="10744200" cy="548640"/>
           </a:xfrm>
           <a:prstGeom prst="rect">
             <a:avLst/>
@@ -10099,7 +10099,7 @@
         </p:nvSpPr>
         <p:spPr>
           <a:xfrm>
-            <a:off x="566928" y="5669280"/>
+            <a:off x="566928" y="5897880"/>
             <a:ext cx="11018520" cy="365760"/>
           </a:xfrm>
           <a:prstGeom prst="rect">
@@ -10316,7 +10316,7 @@
                     <a:lstStyle/>
                     <a:p>
                       <a:r>
-                        <a:rPr sz="1050" b="0">
+                        <a:rPr sz="1150" b="0">
                           <a:solidFill>
                             <a:srgbClr val="FFFFFF"/>
                           </a:solidFill>
@@ -10338,7 +10338,7 @@
                     <a:lstStyle/>
                     <a:p>
                       <a:r>
-                        <a:rPr sz="1050" b="0">
+                        <a:rPr sz="1150" b="0">
                           <a:solidFill>
                             <a:srgbClr val="FFFFFF"/>
                           </a:solidFill>
@@ -10360,7 +10360,7 @@
                     <a:lstStyle/>
                     <a:p>
                       <a:r>
-                        <a:rPr sz="1050" b="0">
+                        <a:rPr sz="1150" b="0">
                           <a:solidFill>
                             <a:srgbClr val="FFFFFF"/>
                           </a:solidFill>
@@ -10384,7 +10384,7 @@
                     <a:lstStyle/>
                     <a:p>
                       <a:r>
-                        <a:rPr sz="1050" b="0">
+                        <a:rPr sz="1150" b="0">
                           <a:solidFill>
                             <a:srgbClr val="181818"/>
                           </a:solidFill>
@@ -10406,7 +10406,7 @@
                     <a:lstStyle/>
                     <a:p>
                       <a:r>
-                        <a:rPr sz="1050" b="0">
+                        <a:rPr sz="1150" b="0">
                           <a:solidFill>
                             <a:srgbClr val="181818"/>
                           </a:solidFill>
@@ -10428,7 +10428,7 @@
                     <a:lstStyle/>
                     <a:p>
                       <a:r>
-                        <a:rPr sz="1050" b="0">
+                        <a:rPr sz="1150" b="0">
                           <a:solidFill>
                             <a:srgbClr val="181818"/>
                           </a:solidFill>
@@ -10452,7 +10452,7 @@
                     <a:lstStyle/>
                     <a:p>
                       <a:r>
-                        <a:rPr sz="1050" b="0">
+                        <a:rPr sz="1150" b="0">
                           <a:solidFill>
                             <a:srgbClr val="181818"/>
                           </a:solidFill>
@@ -10474,7 +10474,7 @@
                     <a:lstStyle/>
                     <a:p>
                       <a:r>
-                        <a:rPr sz="1050" b="0">
+                        <a:rPr sz="1150" b="0">
                           <a:solidFill>
                             <a:srgbClr val="181818"/>
                           </a:solidFill>
@@ -10496,7 +10496,7 @@
                     <a:lstStyle/>
                     <a:p>
                       <a:r>
-                        <a:rPr sz="1050" b="0">
+                        <a:rPr sz="1150" b="0">
                           <a:solidFill>
                             <a:srgbClr val="181818"/>
                           </a:solidFill>
@@ -10548,7 +10548,7 @@
                     <a:lstStyle/>
                     <a:p>
                       <a:r>
-                        <a:rPr sz="1050" b="0">
+                        <a:rPr sz="1150" b="0">
                           <a:solidFill>
                             <a:srgbClr val="FFFFFF"/>
                           </a:solidFill>
@@ -10570,7 +10570,7 @@
                     <a:lstStyle/>
                     <a:p>
                       <a:r>
-                        <a:rPr sz="1050" b="0">
+                        <a:rPr sz="1150" b="0">
                           <a:solidFill>
                             <a:srgbClr val="FFFFFF"/>
                           </a:solidFill>
@@ -10592,7 +10592,7 @@
                     <a:lstStyle/>
                     <a:p>
                       <a:r>
-                        <a:rPr sz="1050" b="0">
+                        <a:rPr sz="1150" b="0">
                           <a:solidFill>
                             <a:srgbClr val="FFFFFF"/>
                           </a:solidFill>
@@ -10614,7 +10614,7 @@
                     <a:lstStyle/>
                     <a:p>
                       <a:r>
-                        <a:rPr sz="1050" b="0">
+                        <a:rPr sz="1150" b="0">
                           <a:solidFill>
                             <a:srgbClr val="FFFFFF"/>
                           </a:solidFill>
@@ -10638,7 +10638,7 @@
                     <a:lstStyle/>
                     <a:p>
                       <a:r>
-                        <a:rPr sz="1050" b="0">
+                        <a:rPr sz="1150" b="0">
                           <a:solidFill>
                             <a:srgbClr val="181818"/>
                           </a:solidFill>
@@ -10660,7 +10660,7 @@
                     <a:lstStyle/>
                     <a:p>
                       <a:r>
-                        <a:rPr sz="1050" b="0">
+                        <a:rPr sz="1150" b="0">
                           <a:solidFill>
                             <a:srgbClr val="181818"/>
                           </a:solidFill>
@@ -10682,7 +10682,7 @@
                     <a:lstStyle/>
                     <a:p>
                       <a:r>
-                        <a:rPr sz="1050" b="0">
+                        <a:rPr sz="1150" b="0">
                           <a:solidFill>
                             <a:srgbClr val="181818"/>
                           </a:solidFill>
@@ -10704,7 +10704,7 @@
                     <a:lstStyle/>
                     <a:p>
                       <a:r>
-                        <a:rPr sz="1050" b="0">
+                        <a:rPr sz="1150" b="0">
                           <a:solidFill>
                             <a:srgbClr val="181818"/>
                           </a:solidFill>
@@ -10728,7 +10728,7 @@
                     <a:lstStyle/>
                     <a:p>
                       <a:r>
-                        <a:rPr sz="1050" b="0">
+                        <a:rPr sz="1150" b="0">
                           <a:solidFill>
                             <a:srgbClr val="181818"/>
                           </a:solidFill>
@@ -10750,7 +10750,7 @@
                     <a:lstStyle/>
                     <a:p>
                       <a:r>
-                        <a:rPr sz="1050" b="0">
+                        <a:rPr sz="1150" b="0">
                           <a:solidFill>
                             <a:srgbClr val="181818"/>
                           </a:solidFill>
@@ -10772,7 +10772,7 @@
                     <a:lstStyle/>
                     <a:p>
                       <a:r>
-                        <a:rPr sz="1050" b="0">
+                        <a:rPr sz="1150" b="0">
                           <a:solidFill>
                             <a:srgbClr val="181818"/>
                           </a:solidFill>
@@ -10794,7 +10794,7 @@
                     <a:lstStyle/>
                     <a:p>
                       <a:r>
-                        <a:rPr sz="1050" b="0">
+                        <a:rPr sz="1150" b="0">
                           <a:solidFill>
                             <a:srgbClr val="181818"/>
                           </a:solidFill>
@@ -10818,7 +10818,7 @@
                     <a:lstStyle/>
                     <a:p>
                       <a:r>
-                        <a:rPr sz="1050" b="0">
+                        <a:rPr sz="1150" b="0">
                           <a:solidFill>
                             <a:srgbClr val="181818"/>
                           </a:solidFill>
@@ -10840,7 +10840,7 @@
                     <a:lstStyle/>
                     <a:p>
                       <a:r>
-                        <a:rPr sz="1050" b="0">
+                        <a:rPr sz="1150" b="0">
                           <a:solidFill>
                             <a:srgbClr val="181818"/>
                           </a:solidFill>
@@ -10862,7 +10862,7 @@
                     <a:lstStyle/>
                     <a:p>
                       <a:r>
-                        <a:rPr sz="1050" b="0">
+                        <a:rPr sz="1150" b="0">
                           <a:solidFill>
                             <a:srgbClr val="181818"/>
                           </a:solidFill>
@@ -10884,7 +10884,7 @@
                     <a:lstStyle/>
                     <a:p>
                       <a:r>
-                        <a:rPr sz="1050" b="0">
+                        <a:rPr sz="1150" b="0">
                           <a:solidFill>
                             <a:srgbClr val="181818"/>
                           </a:solidFill>
@@ -10908,7 +10908,7 @@
                     <a:lstStyle/>
                     <a:p>
                       <a:r>
-                        <a:rPr sz="1050" b="0">
+                        <a:rPr sz="1150" b="0">
                           <a:solidFill>
                             <a:srgbClr val="181818"/>
                           </a:solidFill>
@@ -10930,7 +10930,7 @@
                     <a:lstStyle/>
                     <a:p>
                       <a:r>
-                        <a:rPr sz="1050" b="0">
+                        <a:rPr sz="1150" b="0">
                           <a:solidFill>
                             <a:srgbClr val="181818"/>
                           </a:solidFill>
@@ -10952,7 +10952,7 @@
                     <a:lstStyle/>
                     <a:p>
                       <a:r>
-                        <a:rPr sz="1050" b="0">
+                        <a:rPr sz="1150" b="0">
                           <a:solidFill>
                             <a:srgbClr val="181818"/>
                           </a:solidFill>
@@ -10974,7 +10974,7 @@
                     <a:lstStyle/>
                     <a:p>
                       <a:r>
-                        <a:rPr sz="1050" b="0">
+                        <a:rPr sz="1150" b="0">
                           <a:solidFill>
                             <a:srgbClr val="181818"/>
                           </a:solidFill>
@@ -11323,7 +11323,7 @@
                     <a:lstStyle/>
                     <a:p>
                       <a:r>
-                        <a:rPr sz="950" b="0">
+                        <a:rPr sz="1050" b="0">
                           <a:solidFill>
                             <a:srgbClr val="FFFFFF"/>
                           </a:solidFill>
@@ -11345,7 +11345,7 @@
                     <a:lstStyle/>
                     <a:p>
                       <a:r>
-                        <a:rPr sz="950" b="0">
+                        <a:rPr sz="1050" b="0">
                           <a:solidFill>
                             <a:srgbClr val="FFFFFF"/>
                           </a:solidFill>
@@ -11367,7 +11367,7 @@
                     <a:lstStyle/>
                     <a:p>
                       <a:r>
-                        <a:rPr sz="950" b="0">
+                        <a:rPr sz="1050" b="0">
                           <a:solidFill>
                             <a:srgbClr val="FFFFFF"/>
                           </a:solidFill>
@@ -11391,7 +11391,7 @@
                     <a:lstStyle/>
                     <a:p>
                       <a:r>
-                        <a:rPr sz="950" b="0">
+                        <a:rPr sz="1050" b="0">
                           <a:solidFill>
                             <a:srgbClr val="181818"/>
                           </a:solidFill>
@@ -11413,7 +11413,7 @@
                     <a:lstStyle/>
                     <a:p>
                       <a:r>
-                        <a:rPr sz="950" b="0">
+                        <a:rPr sz="1050" b="0">
                           <a:solidFill>
                             <a:srgbClr val="181818"/>
                           </a:solidFill>
@@ -11435,7 +11435,7 @@
                     <a:lstStyle/>
                     <a:p>
                       <a:r>
-                        <a:rPr sz="950" b="0">
+                        <a:rPr sz="1050" b="0">
                           <a:solidFill>
                             <a:srgbClr val="181818"/>
                           </a:solidFill>
@@ -11459,7 +11459,7 @@
                     <a:lstStyle/>
                     <a:p>
                       <a:r>
-                        <a:rPr sz="950" b="0">
+                        <a:rPr sz="1050" b="0">
                           <a:solidFill>
                             <a:srgbClr val="181818"/>
                           </a:solidFill>
@@ -11481,7 +11481,7 @@
                     <a:lstStyle/>
                     <a:p>
                       <a:r>
-                        <a:rPr sz="950" b="0">
+                        <a:rPr sz="1050" b="0">
                           <a:solidFill>
                             <a:srgbClr val="181818"/>
                           </a:solidFill>
@@ -11503,7 +11503,7 @@
                     <a:lstStyle/>
                     <a:p>
                       <a:r>
-                        <a:rPr sz="950" b="0">
+                        <a:rPr sz="1050" b="0">
                           <a:solidFill>
                             <a:srgbClr val="181818"/>
                           </a:solidFill>
@@ -11527,7 +11527,7 @@
                     <a:lstStyle/>
                     <a:p>
                       <a:r>
-                        <a:rPr sz="950" b="0">
+                        <a:rPr sz="1050" b="0">
                           <a:solidFill>
                             <a:srgbClr val="181818"/>
                           </a:solidFill>
@@ -11549,7 +11549,7 @@
                     <a:lstStyle/>
                     <a:p>
                       <a:r>
-                        <a:rPr sz="950" b="0">
+                        <a:rPr sz="1050" b="0">
                           <a:solidFill>
                             <a:srgbClr val="181818"/>
                           </a:solidFill>
@@ -11571,7 +11571,7 @@
                     <a:lstStyle/>
                     <a:p>
                       <a:r>
-                        <a:rPr sz="950" b="0">
+                        <a:rPr sz="1050" b="0">
                           <a:solidFill>
                             <a:srgbClr val="181818"/>
                           </a:solidFill>
@@ -11595,7 +11595,7 @@
                     <a:lstStyle/>
                     <a:p>
                       <a:r>
-                        <a:rPr sz="950" b="0">
+                        <a:rPr sz="1050" b="0">
                           <a:solidFill>
                             <a:srgbClr val="181818"/>
                           </a:solidFill>
@@ -11617,7 +11617,7 @@
                     <a:lstStyle/>
                     <a:p>
                       <a:r>
-                        <a:rPr sz="950" b="0">
+                        <a:rPr sz="1050" b="0">
                           <a:solidFill>
                             <a:srgbClr val="181818"/>
                           </a:solidFill>
@@ -11639,7 +11639,7 @@
                     <a:lstStyle/>
                     <a:p>
                       <a:r>
-                        <a:rPr sz="950" b="0">
+                        <a:rPr sz="1050" b="0">
                           <a:solidFill>
                             <a:srgbClr val="181818"/>
                           </a:solidFill>
@@ -11663,7 +11663,7 @@
                     <a:lstStyle/>
                     <a:p>
                       <a:r>
-                        <a:rPr sz="950" b="0">
+                        <a:rPr sz="1050" b="0">
                           <a:solidFill>
                             <a:srgbClr val="181818"/>
                           </a:solidFill>
@@ -11685,7 +11685,7 @@
                     <a:lstStyle/>
                     <a:p>
                       <a:r>
-                        <a:rPr sz="950" b="0">
+                        <a:rPr sz="1050" b="0">
                           <a:solidFill>
                             <a:srgbClr val="181818"/>
                           </a:solidFill>
@@ -11707,7 +11707,7 @@
                     <a:lstStyle/>
                     <a:p>
                       <a:r>
-                        <a:rPr sz="950" b="0">
+                        <a:rPr sz="1050" b="0">
                           <a:solidFill>
                             <a:srgbClr val="181818"/>
                           </a:solidFill>
@@ -11731,7 +11731,7 @@
                     <a:lstStyle/>
                     <a:p>
                       <a:r>
-                        <a:rPr sz="950" b="0">
+                        <a:rPr sz="1050" b="0">
                           <a:solidFill>
                             <a:srgbClr val="181818"/>
                           </a:solidFill>
@@ -11753,7 +11753,7 @@
                     <a:lstStyle/>
                     <a:p>
                       <a:r>
-                        <a:rPr sz="950" b="0">
+                        <a:rPr sz="1050" b="0">
                           <a:solidFill>
                             <a:srgbClr val="181818"/>
                           </a:solidFill>
@@ -11775,7 +11775,7 @@
                     <a:lstStyle/>
                     <a:p>
                       <a:r>
-                        <a:rPr sz="950" b="0">
+                        <a:rPr sz="1050" b="0">
                           <a:solidFill>
                             <a:srgbClr val="181818"/>
                           </a:solidFill>
@@ -11804,8 +11804,8 @@
         </p:nvSpPr>
         <p:spPr>
           <a:xfrm>
-            <a:off x="566928" y="4846320"/>
-            <a:ext cx="11018520" cy="868680"/>
+            <a:off x="566928" y="5029200"/>
+            <a:ext cx="11018520" cy="960120"/>
           </a:xfrm>
           <a:prstGeom prst="roundRect">
             <a:avLst>
@@ -11850,8 +11850,8 @@
         </p:nvSpPr>
         <p:spPr>
           <a:xfrm>
-            <a:off x="704088" y="4937759"/>
-            <a:ext cx="10744200" cy="685800"/>
+            <a:off x="704088" y="5120640"/>
+            <a:ext cx="10744200" cy="777240"/>
           </a:xfrm>
           <a:prstGeom prst="rect">
             <a:avLst/>
@@ -11870,7 +11870,7 @@
               </a:lnSpc>
             </a:pPr>
             <a:r>
-              <a:rPr sz="950" b="0">
+              <a:rPr sz="1050" b="0">
                 <a:solidFill>
                   <a:srgbClr val="303030"/>
                 </a:solidFill>
@@ -11886,7 +11886,7 @@
               </a:lnSpc>
             </a:pPr>
             <a:r>
-              <a:rPr sz="950" b="0">
+              <a:rPr sz="1050" b="0">
                 <a:solidFill>
                   <a:srgbClr val="303030"/>
                 </a:solidFill>
@@ -11902,7 +11902,7 @@
               </a:lnSpc>
             </a:pPr>
             <a:r>
-              <a:rPr sz="950" b="0">
+              <a:rPr sz="1050" b="0">
                 <a:solidFill>
                   <a:srgbClr val="303030"/>
                 </a:solidFill>
@@ -11918,7 +11918,7 @@
               </a:lnSpc>
             </a:pPr>
             <a:r>
-              <a:rPr sz="950" b="0">
+              <a:rPr sz="1050" b="0">
                 <a:solidFill>
                   <a:srgbClr val="303030"/>
                 </a:solidFill>
@@ -11937,7 +11937,7 @@
         </p:nvSpPr>
         <p:spPr>
           <a:xfrm>
-            <a:off x="566928" y="5806440"/>
+            <a:off x="566928" y="6035040"/>
             <a:ext cx="11018520" cy="365760"/>
           </a:xfrm>
           <a:prstGeom prst="rect">
@@ -12198,7 +12198,7 @@
               </a:lnSpc>
             </a:pPr>
             <a:r>
-              <a:rPr sz="1900" b="1">
+              <a:rPr sz="2100" b="1">
                 <a:solidFill>
                   <a:srgbClr val="923826"/>
                 </a:solidFill>
@@ -12237,7 +12237,7 @@
               </a:lnSpc>
             </a:pPr>
             <a:r>
-              <a:rPr sz="950" b="0">
+              <a:rPr sz="1100" b="0">
                 <a:solidFill>
                   <a:srgbClr val="595959"/>
                 </a:solidFill>
@@ -12253,7 +12253,7 @@
               </a:lnSpc>
             </a:pPr>
             <a:r>
-              <a:rPr sz="950" b="0">
+              <a:rPr sz="1100" b="0">
                 <a:solidFill>
                   <a:srgbClr val="595959"/>
                 </a:solidFill>
@@ -12338,7 +12338,7 @@
               </a:lnSpc>
             </a:pPr>
             <a:r>
-              <a:rPr sz="1900" b="1">
+              <a:rPr sz="2100" b="1">
                 <a:solidFill>
                   <a:srgbClr val="923826"/>
                 </a:solidFill>
@@ -12377,7 +12377,7 @@
               </a:lnSpc>
             </a:pPr>
             <a:r>
-              <a:rPr sz="950" b="0">
+              <a:rPr sz="1100" b="0">
                 <a:solidFill>
                   <a:srgbClr val="595959"/>
                 </a:solidFill>
@@ -12393,7 +12393,7 @@
               </a:lnSpc>
             </a:pPr>
             <a:r>
-              <a:rPr sz="950" b="0">
+              <a:rPr sz="1100" b="0">
                 <a:solidFill>
                   <a:srgbClr val="595959"/>
                 </a:solidFill>
@@ -12478,7 +12478,7 @@
               </a:lnSpc>
             </a:pPr>
             <a:r>
-              <a:rPr sz="1900" b="1">
+              <a:rPr sz="2100" b="1">
                 <a:solidFill>
                   <a:srgbClr val="923826"/>
                 </a:solidFill>
@@ -12517,7 +12517,7 @@
               </a:lnSpc>
             </a:pPr>
             <a:r>
-              <a:rPr sz="950" b="0">
+              <a:rPr sz="1100" b="0">
                 <a:solidFill>
                   <a:srgbClr val="595959"/>
                 </a:solidFill>
@@ -12533,7 +12533,7 @@
               </a:lnSpc>
             </a:pPr>
             <a:r>
-              <a:rPr sz="950" b="0">
+              <a:rPr sz="1100" b="0">
                 <a:solidFill>
                   <a:srgbClr val="595959"/>
                 </a:solidFill>
@@ -12618,7 +12618,7 @@
               </a:lnSpc>
             </a:pPr>
             <a:r>
-              <a:rPr sz="1900" b="1">
+              <a:rPr sz="2100" b="1">
                 <a:solidFill>
                   <a:srgbClr val="923826"/>
                 </a:solidFill>
@@ -12657,7 +12657,7 @@
               </a:lnSpc>
             </a:pPr>
             <a:r>
-              <a:rPr sz="950" b="0">
+              <a:rPr sz="1100" b="0">
                 <a:solidFill>
                   <a:srgbClr val="595959"/>
                 </a:solidFill>
@@ -12673,7 +12673,7 @@
               </a:lnSpc>
             </a:pPr>
             <a:r>
-              <a:rPr sz="950" b="0">
+              <a:rPr sz="1100" b="0">
                 <a:solidFill>
                   <a:srgbClr val="595959"/>
                 </a:solidFill>
@@ -12795,7 +12795,7 @@
                     <a:lstStyle/>
                     <a:p>
                       <a:r>
-                        <a:rPr sz="950" b="0">
+                        <a:rPr sz="1050" b="0">
                           <a:solidFill>
                             <a:srgbClr val="FFFFFF"/>
                           </a:solidFill>
@@ -12817,7 +12817,7 @@
                     <a:lstStyle/>
                     <a:p>
                       <a:r>
-                        <a:rPr sz="950" b="0">
+                        <a:rPr sz="1050" b="0">
                           <a:solidFill>
                             <a:srgbClr val="FFFFFF"/>
                           </a:solidFill>
@@ -12839,7 +12839,7 @@
                     <a:lstStyle/>
                     <a:p>
                       <a:r>
-                        <a:rPr sz="950" b="0">
+                        <a:rPr sz="1050" b="0">
                           <a:solidFill>
                             <a:srgbClr val="FFFFFF"/>
                           </a:solidFill>
@@ -12861,7 +12861,7 @@
                     <a:lstStyle/>
                     <a:p>
                       <a:r>
-                        <a:rPr sz="950" b="0">
+                        <a:rPr sz="1050" b="0">
                           <a:solidFill>
                             <a:srgbClr val="FFFFFF"/>
                           </a:solidFill>
@@ -12883,7 +12883,7 @@
                     <a:lstStyle/>
                     <a:p>
                       <a:r>
-                        <a:rPr sz="950" b="0">
+                        <a:rPr sz="1050" b="0">
                           <a:solidFill>
                             <a:srgbClr val="FFFFFF"/>
                           </a:solidFill>
@@ -12905,7 +12905,7 @@
                     <a:lstStyle/>
                     <a:p>
                       <a:r>
-                        <a:rPr sz="950" b="0">
+                        <a:rPr sz="1050" b="0">
                           <a:solidFill>
                             <a:srgbClr val="FFFFFF"/>
                           </a:solidFill>
@@ -12929,7 +12929,7 @@
                     <a:lstStyle/>
                     <a:p>
                       <a:r>
-                        <a:rPr sz="950" b="0">
+                        <a:rPr sz="1050" b="0">
                           <a:solidFill>
                             <a:srgbClr val="181818"/>
                           </a:solidFill>
@@ -12951,7 +12951,7 @@
                     <a:lstStyle/>
                     <a:p>
                       <a:r>
-                        <a:rPr sz="950" b="0">
+                        <a:rPr sz="1050" b="0">
                           <a:solidFill>
                             <a:srgbClr val="181818"/>
                           </a:solidFill>
@@ -12973,7 +12973,7 @@
                     <a:lstStyle/>
                     <a:p>
                       <a:r>
-                        <a:rPr sz="950" b="0">
+                        <a:rPr sz="1050" b="0">
                           <a:solidFill>
                             <a:srgbClr val="181818"/>
                           </a:solidFill>
@@ -12995,7 +12995,7 @@
                     <a:lstStyle/>
                     <a:p>
                       <a:r>
-                        <a:rPr sz="950" b="0">
+                        <a:rPr sz="1050" b="0">
                           <a:solidFill>
                             <a:srgbClr val="181818"/>
                           </a:solidFill>
@@ -13017,7 +13017,7 @@
                     <a:lstStyle/>
                     <a:p>
                       <a:r>
-                        <a:rPr sz="950" b="0">
+                        <a:rPr sz="1050" b="0">
                           <a:solidFill>
                             <a:srgbClr val="181818"/>
                           </a:solidFill>
@@ -13039,7 +13039,7 @@
                     <a:lstStyle/>
                     <a:p>
                       <a:r>
-                        <a:rPr sz="950" b="0">
+                        <a:rPr sz="1050" b="0">
                           <a:solidFill>
                             <a:srgbClr val="181818"/>
                           </a:solidFill>
@@ -13063,7 +13063,7 @@
                     <a:lstStyle/>
                     <a:p>
                       <a:r>
-                        <a:rPr sz="950" b="0">
+                        <a:rPr sz="1050" b="0">
                           <a:solidFill>
                             <a:srgbClr val="181818"/>
                           </a:solidFill>
@@ -13085,7 +13085,7 @@
                     <a:lstStyle/>
                     <a:p>
                       <a:r>
-                        <a:rPr sz="950" b="0">
+                        <a:rPr sz="1050" b="0">
                           <a:solidFill>
                             <a:srgbClr val="181818"/>
                           </a:solidFill>
@@ -13107,7 +13107,7 @@
                     <a:lstStyle/>
                     <a:p>
                       <a:r>
-                        <a:rPr sz="950" b="0">
+                        <a:rPr sz="1050" b="0">
                           <a:solidFill>
                             <a:srgbClr val="181818"/>
                           </a:solidFill>
@@ -13129,7 +13129,7 @@
                     <a:lstStyle/>
                     <a:p>
                       <a:r>
-                        <a:rPr sz="950" b="0">
+                        <a:rPr sz="1050" b="0">
                           <a:solidFill>
                             <a:srgbClr val="181818"/>
                           </a:solidFill>
@@ -13151,7 +13151,7 @@
                     <a:lstStyle/>
                     <a:p>
                       <a:r>
-                        <a:rPr sz="950" b="0">
+                        <a:rPr sz="1050" b="0">
                           <a:solidFill>
                             <a:srgbClr val="181818"/>
                           </a:solidFill>
@@ -13173,7 +13173,7 @@
                     <a:lstStyle/>
                     <a:p>
                       <a:r>
-                        <a:rPr sz="950" b="0">
+                        <a:rPr sz="1050" b="0">
                           <a:solidFill>
                             <a:srgbClr val="181818"/>
                           </a:solidFill>
@@ -13197,7 +13197,7 @@
                     <a:lstStyle/>
                     <a:p>
                       <a:r>
-                        <a:rPr sz="950" b="0">
+                        <a:rPr sz="1050" b="0">
                           <a:solidFill>
                             <a:srgbClr val="181818"/>
                           </a:solidFill>
@@ -13219,7 +13219,7 @@
                     <a:lstStyle/>
                     <a:p>
                       <a:r>
-                        <a:rPr sz="950" b="0">
+                        <a:rPr sz="1050" b="0">
                           <a:solidFill>
                             <a:srgbClr val="181818"/>
                           </a:solidFill>
@@ -13241,7 +13241,7 @@
                     <a:lstStyle/>
                     <a:p>
                       <a:r>
-                        <a:rPr sz="950" b="0">
+                        <a:rPr sz="1050" b="0">
                           <a:solidFill>
                             <a:srgbClr val="181818"/>
                           </a:solidFill>
@@ -13263,7 +13263,7 @@
                     <a:lstStyle/>
                     <a:p>
                       <a:r>
-                        <a:rPr sz="950" b="0">
+                        <a:rPr sz="1050" b="0">
                           <a:solidFill>
                             <a:srgbClr val="181818"/>
                           </a:solidFill>
@@ -13285,7 +13285,7 @@
                     <a:lstStyle/>
                     <a:p>
                       <a:r>
-                        <a:rPr sz="950" b="0">
+                        <a:rPr sz="1050" b="0">
                           <a:solidFill>
                             <a:srgbClr val="181818"/>
                           </a:solidFill>
@@ -13307,7 +13307,7 @@
                     <a:lstStyle/>
                     <a:p>
                       <a:r>
-                        <a:rPr sz="950" b="0">
+                        <a:rPr sz="1050" b="0">
                           <a:solidFill>
                             <a:srgbClr val="181818"/>
                           </a:solidFill>
@@ -13331,7 +13331,7 @@
                     <a:lstStyle/>
                     <a:p>
                       <a:r>
-                        <a:rPr sz="950" b="0">
+                        <a:rPr sz="1050" b="0">
                           <a:solidFill>
                             <a:srgbClr val="181818"/>
                           </a:solidFill>
@@ -13353,7 +13353,7 @@
                     <a:lstStyle/>
                     <a:p>
                       <a:r>
-                        <a:rPr sz="950" b="0">
+                        <a:rPr sz="1050" b="0">
                           <a:solidFill>
                             <a:srgbClr val="181818"/>
                           </a:solidFill>
@@ -13375,7 +13375,7 @@
                     <a:lstStyle/>
                     <a:p>
                       <a:r>
-                        <a:rPr sz="950" b="0">
+                        <a:rPr sz="1050" b="0">
                           <a:solidFill>
                             <a:srgbClr val="181818"/>
                           </a:solidFill>
@@ -13397,7 +13397,7 @@
                     <a:lstStyle/>
                     <a:p>
                       <a:r>
-                        <a:rPr sz="950" b="0">
+                        <a:rPr sz="1050" b="0">
                           <a:solidFill>
                             <a:srgbClr val="181818"/>
                           </a:solidFill>
@@ -13419,7 +13419,7 @@
                     <a:lstStyle/>
                     <a:p>
                       <a:r>
-                        <a:rPr sz="950" b="0">
+                        <a:rPr sz="1050" b="0">
                           <a:solidFill>
                             <a:srgbClr val="181818"/>
                           </a:solidFill>
@@ -13441,7 +13441,7 @@
                     <a:lstStyle/>
                     <a:p>
                       <a:r>
-                        <a:rPr sz="950" b="0">
+                        <a:rPr sz="1050" b="0">
                           <a:solidFill>
                             <a:srgbClr val="181818"/>
                           </a:solidFill>
@@ -13465,7 +13465,7 @@
                     <a:lstStyle/>
                     <a:p>
                       <a:r>
-                        <a:rPr sz="950" b="0">
+                        <a:rPr sz="1050" b="0">
                           <a:solidFill>
                             <a:srgbClr val="181818"/>
                           </a:solidFill>
@@ -13487,7 +13487,7 @@
                     <a:lstStyle/>
                     <a:p>
                       <a:r>
-                        <a:rPr sz="950" b="0">
+                        <a:rPr sz="1050" b="0">
                           <a:solidFill>
                             <a:srgbClr val="181818"/>
                           </a:solidFill>
@@ -13509,7 +13509,7 @@
                     <a:lstStyle/>
                     <a:p>
                       <a:r>
-                        <a:rPr sz="950" b="0">
+                        <a:rPr sz="1050" b="0">
                           <a:solidFill>
                             <a:srgbClr val="181818"/>
                           </a:solidFill>
@@ -13531,7 +13531,7 @@
                     <a:lstStyle/>
                     <a:p>
                       <a:r>
-                        <a:rPr sz="950" b="0">
+                        <a:rPr sz="1050" b="0">
                           <a:solidFill>
                             <a:srgbClr val="181818"/>
                           </a:solidFill>
@@ -13553,7 +13553,7 @@
                     <a:lstStyle/>
                     <a:p>
                       <a:r>
-                        <a:rPr sz="950" b="0">
+                        <a:rPr sz="1050" b="0">
                           <a:solidFill>
                             <a:srgbClr val="181818"/>
                           </a:solidFill>
@@ -13575,7 +13575,7 @@
                     <a:lstStyle/>
                     <a:p>
                       <a:r>
-                        <a:rPr sz="950" b="0">
+                        <a:rPr sz="1050" b="0">
                           <a:solidFill>
                             <a:srgbClr val="181818"/>
                           </a:solidFill>
@@ -13604,7 +13604,7 @@
         </p:nvSpPr>
         <p:spPr>
           <a:xfrm>
-            <a:off x="566928" y="5349240"/>
+            <a:off x="566928" y="5669280"/>
             <a:ext cx="11018520" cy="4754880"/>
           </a:xfrm>
           <a:prstGeom prst="rect">
@@ -13624,7 +13624,7 @@
               </a:spcAft>
             </a:pPr>
             <a:r>
-              <a:rPr sz="1100">
+              <a:rPr sz="1150">
                 <a:solidFill>
                   <a:srgbClr val="181818"/>
                 </a:solidFill>
@@ -13640,7 +13640,7 @@
               </a:spcAft>
             </a:pPr>
             <a:r>
-              <a:rPr sz="1100">
+              <a:rPr sz="1150">
                 <a:solidFill>
                   <a:srgbClr val="181818"/>
                 </a:solidFill>
@@ -13837,7 +13837,7 @@
                     <a:lstStyle/>
                     <a:p>
                       <a:r>
-                        <a:rPr sz="950" b="0">
+                        <a:rPr sz="1050" b="0">
                           <a:solidFill>
                             <a:srgbClr val="FFFFFF"/>
                           </a:solidFill>
@@ -13859,7 +13859,7 @@
                     <a:lstStyle/>
                     <a:p>
                       <a:r>
-                        <a:rPr sz="950" b="0">
+                        <a:rPr sz="1050" b="0">
                           <a:solidFill>
                             <a:srgbClr val="FFFFFF"/>
                           </a:solidFill>
@@ -13881,7 +13881,7 @@
                     <a:lstStyle/>
                     <a:p>
                       <a:r>
-                        <a:rPr sz="950" b="0">
+                        <a:rPr sz="1050" b="0">
                           <a:solidFill>
                             <a:srgbClr val="FFFFFF"/>
                           </a:solidFill>
@@ -13905,7 +13905,7 @@
                     <a:lstStyle/>
                     <a:p>
                       <a:r>
-                        <a:rPr sz="950" b="0">
+                        <a:rPr sz="1050" b="0">
                           <a:solidFill>
                             <a:srgbClr val="181818"/>
                           </a:solidFill>
@@ -13927,7 +13927,7 @@
                     <a:lstStyle/>
                     <a:p>
                       <a:r>
-                        <a:rPr sz="950" b="0">
+                        <a:rPr sz="1050" b="0">
                           <a:solidFill>
                             <a:srgbClr val="181818"/>
                           </a:solidFill>
@@ -13949,7 +13949,7 @@
                     <a:lstStyle/>
                     <a:p>
                       <a:r>
-                        <a:rPr sz="950" b="0">
+                        <a:rPr sz="1050" b="0">
                           <a:solidFill>
                             <a:srgbClr val="181818"/>
                           </a:solidFill>
@@ -13973,7 +13973,7 @@
                     <a:lstStyle/>
                     <a:p>
                       <a:r>
-                        <a:rPr sz="950" b="0">
+                        <a:rPr sz="1050" b="0">
                           <a:solidFill>
                             <a:srgbClr val="181818"/>
                           </a:solidFill>
@@ -13995,7 +13995,7 @@
                     <a:lstStyle/>
                     <a:p>
                       <a:r>
-                        <a:rPr sz="950" b="0">
+                        <a:rPr sz="1050" b="0">
                           <a:solidFill>
                             <a:srgbClr val="181818"/>
                           </a:solidFill>
@@ -14017,7 +14017,7 @@
                     <a:lstStyle/>
                     <a:p>
                       <a:r>
-                        <a:rPr sz="950" b="0">
+                        <a:rPr sz="1050" b="0">
                           <a:solidFill>
                             <a:srgbClr val="181818"/>
                           </a:solidFill>
@@ -14041,7 +14041,7 @@
                     <a:lstStyle/>
                     <a:p>
                       <a:r>
-                        <a:rPr sz="950" b="0">
+                        <a:rPr sz="1050" b="0">
                           <a:solidFill>
                             <a:srgbClr val="181818"/>
                           </a:solidFill>
@@ -14063,7 +14063,7 @@
                     <a:lstStyle/>
                     <a:p>
                       <a:r>
-                        <a:rPr sz="950" b="0">
+                        <a:rPr sz="1050" b="0">
                           <a:solidFill>
                             <a:srgbClr val="181818"/>
                           </a:solidFill>
@@ -14085,7 +14085,7 @@
                     <a:lstStyle/>
                     <a:p>
                       <a:r>
-                        <a:rPr sz="950" b="0">
+                        <a:rPr sz="1050" b="0">
                           <a:solidFill>
                             <a:srgbClr val="181818"/>
                           </a:solidFill>
@@ -14109,7 +14109,7 @@
                     <a:lstStyle/>
                     <a:p>
                       <a:r>
-                        <a:rPr sz="950" b="0">
+                        <a:rPr sz="1050" b="0">
                           <a:solidFill>
                             <a:srgbClr val="181818"/>
                           </a:solidFill>
@@ -14131,7 +14131,7 @@
                     <a:lstStyle/>
                     <a:p>
                       <a:r>
-                        <a:rPr sz="950" b="0">
+                        <a:rPr sz="1050" b="0">
                           <a:solidFill>
                             <a:srgbClr val="181818"/>
                           </a:solidFill>
@@ -14153,7 +14153,7 @@
                     <a:lstStyle/>
                     <a:p>
                       <a:r>
-                        <a:rPr sz="950" b="0">
+                        <a:rPr sz="1050" b="0">
                           <a:solidFill>
                             <a:srgbClr val="181818"/>
                           </a:solidFill>
@@ -14177,7 +14177,7 @@
                     <a:lstStyle/>
                     <a:p>
                       <a:r>
-                        <a:rPr sz="950" b="0">
+                        <a:rPr sz="1050" b="0">
                           <a:solidFill>
                             <a:srgbClr val="181818"/>
                           </a:solidFill>
@@ -14199,7 +14199,7 @@
                     <a:lstStyle/>
                     <a:p>
                       <a:r>
-                        <a:rPr sz="950" b="0">
+                        <a:rPr sz="1050" b="0">
                           <a:solidFill>
                             <a:srgbClr val="181818"/>
                           </a:solidFill>
@@ -14221,7 +14221,7 @@
                     <a:lstStyle/>
                     <a:p>
                       <a:r>
-                        <a:rPr sz="950" b="0">
+                        <a:rPr sz="1050" b="0">
                           <a:solidFill>
                             <a:srgbClr val="181818"/>
                           </a:solidFill>
@@ -14245,7 +14245,7 @@
                     <a:lstStyle/>
                     <a:p>
                       <a:r>
-                        <a:rPr sz="950" b="0">
+                        <a:rPr sz="1050" b="0">
                           <a:solidFill>
                             <a:srgbClr val="181818"/>
                           </a:solidFill>
@@ -14267,7 +14267,7 @@
                     <a:lstStyle/>
                     <a:p>
                       <a:r>
-                        <a:rPr sz="950" b="0">
+                        <a:rPr sz="1050" b="0">
                           <a:solidFill>
                             <a:srgbClr val="181818"/>
                           </a:solidFill>
@@ -14289,7 +14289,7 @@
                     <a:lstStyle/>
                     <a:p>
                       <a:r>
-                        <a:rPr sz="950" b="0">
+                        <a:rPr sz="1050" b="0">
                           <a:solidFill>
                             <a:srgbClr val="181818"/>
                           </a:solidFill>
@@ -14318,8 +14318,8 @@
         </p:nvSpPr>
         <p:spPr>
           <a:xfrm>
-            <a:off x="566928" y="4846320"/>
-            <a:ext cx="11018520" cy="868680"/>
+            <a:off x="566928" y="5029200"/>
+            <a:ext cx="11018520" cy="914400"/>
           </a:xfrm>
           <a:prstGeom prst="roundRect">
             <a:avLst>
@@ -14364,8 +14364,8 @@
         </p:nvSpPr>
         <p:spPr>
           <a:xfrm>
-            <a:off x="704088" y="4937759"/>
-            <a:ext cx="10744200" cy="685800"/>
+            <a:off x="704088" y="5120640"/>
+            <a:ext cx="10744200" cy="731520"/>
           </a:xfrm>
           <a:prstGeom prst="rect">
             <a:avLst/>
@@ -14384,7 +14384,7 @@
               </a:lnSpc>
             </a:pPr>
             <a:r>
-              <a:rPr sz="950" b="0">
+              <a:rPr sz="1050" b="0">
                 <a:solidFill>
                   <a:srgbClr val="303030"/>
                 </a:solidFill>
@@ -14400,7 +14400,7 @@
               </a:lnSpc>
             </a:pPr>
             <a:r>
-              <a:rPr sz="950" b="0">
+              <a:rPr sz="1050" b="0">
                 <a:solidFill>
                   <a:srgbClr val="303030"/>
                 </a:solidFill>
@@ -14416,7 +14416,7 @@
               </a:lnSpc>
             </a:pPr>
             <a:r>
-              <a:rPr sz="950" b="0">
+              <a:rPr sz="1050" b="0">
                 <a:solidFill>
                   <a:srgbClr val="303030"/>
                 </a:solidFill>
@@ -14435,7 +14435,7 @@
         </p:nvSpPr>
         <p:spPr>
           <a:xfrm>
-            <a:off x="566928" y="5806440"/>
+            <a:off x="566928" y="6035040"/>
             <a:ext cx="11018520" cy="365760"/>
           </a:xfrm>
           <a:prstGeom prst="rect">
@@ -14652,7 +14652,7 @@
                     <a:lstStyle/>
                     <a:p>
                       <a:r>
-                        <a:rPr sz="1000" b="0">
+                        <a:rPr sz="1100" b="0">
                           <a:solidFill>
                             <a:srgbClr val="FFFFFF"/>
                           </a:solidFill>
@@ -14674,7 +14674,7 @@
                     <a:lstStyle/>
                     <a:p>
                       <a:r>
-                        <a:rPr sz="1000" b="0">
+                        <a:rPr sz="1100" b="0">
                           <a:solidFill>
                             <a:srgbClr val="FFFFFF"/>
                           </a:solidFill>
@@ -14696,7 +14696,7 @@
                     <a:lstStyle/>
                     <a:p>
                       <a:r>
-                        <a:rPr sz="1000" b="0">
+                        <a:rPr sz="1100" b="0">
                           <a:solidFill>
                             <a:srgbClr val="FFFFFF"/>
                           </a:solidFill>
@@ -14720,7 +14720,7 @@
                     <a:lstStyle/>
                     <a:p>
                       <a:r>
-                        <a:rPr sz="1000" b="0">
+                        <a:rPr sz="1100" b="0">
                           <a:solidFill>
                             <a:srgbClr val="181818"/>
                           </a:solidFill>
@@ -14742,7 +14742,7 @@
                     <a:lstStyle/>
                     <a:p>
                       <a:r>
-                        <a:rPr sz="1000" b="0">
+                        <a:rPr sz="1100" b="0">
                           <a:solidFill>
                             <a:srgbClr val="181818"/>
                           </a:solidFill>
@@ -14764,7 +14764,7 @@
                     <a:lstStyle/>
                     <a:p>
                       <a:r>
-                        <a:rPr sz="1000" b="0">
+                        <a:rPr sz="1100" b="0">
                           <a:solidFill>
                             <a:srgbClr val="181818"/>
                           </a:solidFill>
@@ -14788,7 +14788,7 @@
                     <a:lstStyle/>
                     <a:p>
                       <a:r>
-                        <a:rPr sz="1000" b="0">
+                        <a:rPr sz="1100" b="0">
                           <a:solidFill>
                             <a:srgbClr val="181818"/>
                           </a:solidFill>
@@ -14810,7 +14810,7 @@
                     <a:lstStyle/>
                     <a:p>
                       <a:r>
-                        <a:rPr sz="1000" b="0">
+                        <a:rPr sz="1100" b="0">
                           <a:solidFill>
                             <a:srgbClr val="181818"/>
                           </a:solidFill>
@@ -14832,7 +14832,7 @@
                     <a:lstStyle/>
                     <a:p>
                       <a:r>
-                        <a:rPr sz="1000" b="0">
+                        <a:rPr sz="1100" b="0">
                           <a:solidFill>
                             <a:srgbClr val="181818"/>
                           </a:solidFill>
@@ -14856,7 +14856,7 @@
                     <a:lstStyle/>
                     <a:p>
                       <a:r>
-                        <a:rPr sz="1000" b="0">
+                        <a:rPr sz="1100" b="0">
                           <a:solidFill>
                             <a:srgbClr val="181818"/>
                           </a:solidFill>
@@ -14878,7 +14878,7 @@
                     <a:lstStyle/>
                     <a:p>
                       <a:r>
-                        <a:rPr sz="1000" b="0">
+                        <a:rPr sz="1100" b="0">
                           <a:solidFill>
                             <a:srgbClr val="181818"/>
                           </a:solidFill>
@@ -14900,7 +14900,7 @@
                     <a:lstStyle/>
                     <a:p>
                       <a:r>
-                        <a:rPr sz="1000" b="0">
+                        <a:rPr sz="1100" b="0">
                           <a:solidFill>
                             <a:srgbClr val="181818"/>
                           </a:solidFill>
@@ -14950,7 +14950,7 @@
                     <a:lstStyle/>
                     <a:p>
                       <a:r>
-                        <a:rPr sz="1000" b="0">
+                        <a:rPr sz="1100" b="0">
                           <a:solidFill>
                             <a:srgbClr val="FFFFFF"/>
                           </a:solidFill>
@@ -14972,7 +14972,7 @@
                     <a:lstStyle/>
                     <a:p>
                       <a:r>
-                        <a:rPr sz="1000" b="0">
+                        <a:rPr sz="1100" b="0">
                           <a:solidFill>
                             <a:srgbClr val="FFFFFF"/>
                           </a:solidFill>
@@ -14996,7 +14996,7 @@
                     <a:lstStyle/>
                     <a:p>
                       <a:r>
-                        <a:rPr sz="1000" b="0">
+                        <a:rPr sz="1100" b="0">
                           <a:solidFill>
                             <a:srgbClr val="181818"/>
                           </a:solidFill>
@@ -15018,7 +15018,7 @@
                     <a:lstStyle/>
                     <a:p>
                       <a:r>
-                        <a:rPr sz="1000" b="0">
+                        <a:rPr sz="1100" b="0">
                           <a:solidFill>
                             <a:srgbClr val="181818"/>
                           </a:solidFill>
@@ -15042,7 +15042,7 @@
                     <a:lstStyle/>
                     <a:p>
                       <a:r>
-                        <a:rPr sz="1000" b="0">
+                        <a:rPr sz="1100" b="0">
                           <a:solidFill>
                             <a:srgbClr val="181818"/>
                           </a:solidFill>
@@ -15064,7 +15064,7 @@
                     <a:lstStyle/>
                     <a:p>
                       <a:r>
-                        <a:rPr sz="1000" b="0">
+                        <a:rPr sz="1100" b="0">
                           <a:solidFill>
                             <a:srgbClr val="181818"/>
                           </a:solidFill>
@@ -15088,7 +15088,7 @@
                     <a:lstStyle/>
                     <a:p>
                       <a:r>
-                        <a:rPr sz="1000" b="0">
+                        <a:rPr sz="1100" b="0">
                           <a:solidFill>
                             <a:srgbClr val="181818"/>
                           </a:solidFill>
@@ -15110,7 +15110,7 @@
                     <a:lstStyle/>
                     <a:p>
                       <a:r>
-                        <a:rPr sz="1000" b="0">
+                        <a:rPr sz="1100" b="0">
                           <a:solidFill>
                             <a:srgbClr val="181818"/>
                           </a:solidFill>
@@ -15134,7 +15134,7 @@
                     <a:lstStyle/>
                     <a:p>
                       <a:r>
-                        <a:rPr sz="1000" b="0">
+                        <a:rPr sz="1100" b="0">
                           <a:solidFill>
                             <a:srgbClr val="181818"/>
                           </a:solidFill>
@@ -15156,7 +15156,7 @@
                     <a:lstStyle/>
                     <a:p>
                       <a:r>
-                        <a:rPr sz="1000" b="0">
+                        <a:rPr sz="1100" b="0">
                           <a:solidFill>
                             <a:srgbClr val="181818"/>
                           </a:solidFill>
@@ -15224,7 +15224,7 @@
         </p:nvSpPr>
         <p:spPr>
           <a:xfrm>
-            <a:off x="566928" y="3886200"/>
+            <a:off x="566928" y="3931920"/>
             <a:ext cx="11018520" cy="4754880"/>
           </a:xfrm>
           <a:prstGeom prst="rect">
@@ -15244,7 +15244,7 @@
               </a:spcAft>
             </a:pPr>
             <a:r>
-              <a:rPr sz="1150">
+              <a:rPr sz="1200">
                 <a:solidFill>
                   <a:srgbClr val="181818"/>
                 </a:solidFill>
@@ -15260,7 +15260,7 @@
               </a:spcAft>
             </a:pPr>
             <a:r>
-              <a:rPr sz="1150">
+              <a:rPr sz="1200">
                 <a:solidFill>
                   <a:srgbClr val="181818"/>
                 </a:solidFill>
@@ -15276,7 +15276,7 @@
               </a:spcAft>
             </a:pPr>
             <a:r>
-              <a:rPr sz="1150">
+              <a:rPr sz="1200">
                 <a:solidFill>
                   <a:srgbClr val="181818"/>
                 </a:solidFill>
@@ -15292,7 +15292,7 @@
               </a:spcAft>
             </a:pPr>
             <a:r>
-              <a:rPr sz="1150">
+              <a:rPr sz="1200">
                 <a:solidFill>
                   <a:srgbClr val="181818"/>
                 </a:solidFill>
@@ -15467,7 +15467,7 @@
         </p:nvSpPr>
         <p:spPr>
           <a:xfrm>
-            <a:off x="566928" y="1325880"/>
+            <a:off x="566928" y="1280160"/>
             <a:ext cx="11018520" cy="4754880"/>
           </a:xfrm>
           <a:prstGeom prst="rect">
@@ -15483,11 +15483,11 @@
           <a:p>
             <a:pPr>
               <a:spcAft>
-                <a:spcPts val="700"/>
+                <a:spcPts val="800"/>
               </a:spcAft>
             </a:pPr>
             <a:r>
-              <a:rPr sz="1150">
+              <a:rPr sz="1350">
                 <a:solidFill>
                   <a:srgbClr val="181818"/>
                 </a:solidFill>
@@ -15499,11 +15499,11 @@
           <a:p>
             <a:pPr>
               <a:spcAft>
-                <a:spcPts val="700"/>
+                <a:spcPts val="800"/>
               </a:spcAft>
             </a:pPr>
             <a:r>
-              <a:rPr sz="1150">
+              <a:rPr sz="1350">
                 <a:solidFill>
                   <a:srgbClr val="181818"/>
                 </a:solidFill>
@@ -15515,11 +15515,11 @@
           <a:p>
             <a:pPr>
               <a:spcAft>
-                <a:spcPts val="700"/>
+                <a:spcPts val="800"/>
               </a:spcAft>
             </a:pPr>
             <a:r>
-              <a:rPr sz="1150">
+              <a:rPr sz="1350">
                 <a:solidFill>
                   <a:srgbClr val="181818"/>
                 </a:solidFill>
@@ -15531,11 +15531,11 @@
           <a:p>
             <a:pPr>
               <a:spcAft>
-                <a:spcPts val="700"/>
+                <a:spcPts val="800"/>
               </a:spcAft>
             </a:pPr>
             <a:r>
-              <a:rPr sz="1150">
+              <a:rPr sz="1350">
                 <a:solidFill>
                   <a:srgbClr val="181818"/>
                 </a:solidFill>
@@ -15547,11 +15547,11 @@
           <a:p>
             <a:pPr>
               <a:spcAft>
-                <a:spcPts val="700"/>
+                <a:spcPts val="800"/>
               </a:spcAft>
             </a:pPr>
             <a:r>
-              <a:rPr sz="1150">
+              <a:rPr sz="1350">
                 <a:solidFill>
                   <a:srgbClr val="181818"/>
                 </a:solidFill>
@@ -15563,11 +15563,11 @@
           <a:p>
             <a:pPr>
               <a:spcAft>
-                <a:spcPts val="700"/>
+                <a:spcPts val="800"/>
               </a:spcAft>
             </a:pPr>
             <a:r>
-              <a:rPr sz="1150">
+              <a:rPr sz="1350">
                 <a:solidFill>
                   <a:srgbClr val="181818"/>
                 </a:solidFill>
@@ -15579,11 +15579,11 @@
           <a:p>
             <a:pPr>
               <a:spcAft>
-                <a:spcPts val="700"/>
+                <a:spcPts val="800"/>
               </a:spcAft>
             </a:pPr>
             <a:r>
-              <a:rPr sz="1150">
+              <a:rPr sz="1350">
                 <a:solidFill>
                   <a:srgbClr val="181818"/>
                 </a:solidFill>
@@ -15595,11 +15595,11 @@
           <a:p>
             <a:pPr>
               <a:spcAft>
-                <a:spcPts val="700"/>
+                <a:spcPts val="800"/>
               </a:spcAft>
             </a:pPr>
             <a:r>
-              <a:rPr sz="1150">
+              <a:rPr sz="1350">
                 <a:solidFill>
                   <a:srgbClr val="181818"/>
                 </a:solidFill>
@@ -15758,7 +15758,7 @@
                     <a:lstStyle/>
                     <a:p>
                       <a:r>
-                        <a:rPr sz="900" b="0">
+                        <a:rPr sz="1000" b="0">
                           <a:solidFill>
                             <a:srgbClr val="FFFFFF"/>
                           </a:solidFill>
@@ -15780,7 +15780,7 @@
                     <a:lstStyle/>
                     <a:p>
                       <a:r>
-                        <a:rPr sz="900" b="0">
+                        <a:rPr sz="1000" b="0">
                           <a:solidFill>
                             <a:srgbClr val="FFFFFF"/>
                           </a:solidFill>
@@ -15802,7 +15802,7 @@
                     <a:lstStyle/>
                     <a:p>
                       <a:r>
-                        <a:rPr sz="900" b="0">
+                        <a:rPr sz="1000" b="0">
                           <a:solidFill>
                             <a:srgbClr val="FFFFFF"/>
                           </a:solidFill>
@@ -15824,7 +15824,7 @@
                     <a:lstStyle/>
                     <a:p>
                       <a:r>
-                        <a:rPr sz="900" b="0">
+                        <a:rPr sz="1000" b="0">
                           <a:solidFill>
                             <a:srgbClr val="FFFFFF"/>
                           </a:solidFill>
@@ -15848,7 +15848,7 @@
                     <a:lstStyle/>
                     <a:p>
                       <a:r>
-                        <a:rPr sz="900" b="0">
+                        <a:rPr sz="1000" b="0">
                           <a:solidFill>
                             <a:srgbClr val="181818"/>
                           </a:solidFill>
@@ -15870,7 +15870,7 @@
                     <a:lstStyle/>
                     <a:p>
                       <a:r>
-                        <a:rPr sz="900" b="0">
+                        <a:rPr sz="1000" b="0">
                           <a:solidFill>
                             <a:srgbClr val="181818"/>
                           </a:solidFill>
@@ -15902,7 +15902,7 @@
                     <a:lstStyle/>
                     <a:p>
                       <a:r>
-                        <a:rPr sz="900" b="0">
+                        <a:rPr sz="1000" b="0">
                           <a:solidFill>
                             <a:srgbClr val="181818"/>
                           </a:solidFill>
@@ -15924,7 +15924,7 @@
                     <a:lstStyle/>
                     <a:p>
                       <a:r>
-                        <a:rPr sz="900" b="0">
+                        <a:rPr sz="1000" b="0">
                           <a:solidFill>
                             <a:srgbClr val="181818"/>
                           </a:solidFill>
@@ -15948,7 +15948,7 @@
                     <a:lstStyle/>
                     <a:p>
                       <a:r>
-                        <a:rPr sz="900" b="0">
+                        <a:rPr sz="1000" b="0">
                           <a:solidFill>
                             <a:srgbClr val="181818"/>
                           </a:solidFill>
@@ -15970,7 +15970,7 @@
                     <a:lstStyle/>
                     <a:p>
                       <a:r>
-                        <a:rPr sz="900" b="0">
+                        <a:rPr sz="1000" b="0">
                           <a:solidFill>
                             <a:srgbClr val="181818"/>
                           </a:solidFill>
@@ -15992,7 +15992,7 @@
                     <a:lstStyle/>
                     <a:p>
                       <a:r>
-                        <a:rPr sz="900" b="0">
+                        <a:rPr sz="1000" b="0">
                           <a:solidFill>
                             <a:srgbClr val="181818"/>
                           </a:solidFill>
@@ -16014,7 +16014,7 @@
                     <a:lstStyle/>
                     <a:p>
                       <a:r>
-                        <a:rPr sz="900" b="0">
+                        <a:rPr sz="1000" b="0">
                           <a:solidFill>
                             <a:srgbClr val="181818"/>
                           </a:solidFill>
@@ -16038,7 +16038,7 @@
                     <a:lstStyle/>
                     <a:p>
                       <a:r>
-                        <a:rPr sz="900" b="0">
+                        <a:rPr sz="1000" b="0">
                           <a:solidFill>
                             <a:srgbClr val="181818"/>
                           </a:solidFill>
@@ -16060,7 +16060,7 @@
                     <a:lstStyle/>
                     <a:p>
                       <a:r>
-                        <a:rPr sz="900" b="0">
+                        <a:rPr sz="1000" b="0">
                           <a:solidFill>
                             <a:srgbClr val="181818"/>
                           </a:solidFill>
@@ -16087,7 +16087,7 @@
                     <a:lstStyle/>
                     <a:p>
                       <a:r>
-                        <a:rPr sz="900" b="0">
+                        <a:rPr sz="1000" b="0">
                           <a:solidFill>
                             <a:srgbClr val="181818"/>
                           </a:solidFill>
@@ -16109,7 +16109,7 @@
                     <a:lstStyle/>
                     <a:p>
                       <a:r>
-                        <a:rPr sz="900" b="0">
+                        <a:rPr sz="1000" b="0">
                           <a:solidFill>
                             <a:srgbClr val="181818"/>
                           </a:solidFill>
@@ -16133,7 +16133,7 @@
                     <a:lstStyle/>
                     <a:p>
                       <a:r>
-                        <a:rPr sz="900" b="0">
+                        <a:rPr sz="1000" b="0">
                           <a:solidFill>
                             <a:srgbClr val="181818"/>
                           </a:solidFill>
@@ -16155,7 +16155,7 @@
                     <a:lstStyle/>
                     <a:p>
                       <a:r>
-                        <a:rPr sz="900" b="0">
+                        <a:rPr sz="1000" b="0">
                           <a:solidFill>
                             <a:srgbClr val="181818"/>
                           </a:solidFill>
@@ -16182,7 +16182,7 @@
                     <a:lstStyle/>
                     <a:p>
                       <a:r>
-                        <a:rPr sz="900" b="0">
+                        <a:rPr sz="1000" b="0">
                           <a:solidFill>
                             <a:srgbClr val="181818"/>
                           </a:solidFill>
@@ -16204,7 +16204,7 @@
                     <a:lstStyle/>
                     <a:p>
                       <a:r>
-                        <a:rPr sz="900" b="0">
+                        <a:rPr sz="1000" b="0">
                           <a:solidFill>
                             <a:srgbClr val="181818"/>
                           </a:solidFill>
@@ -16238,8 +16238,8 @@
         </p:nvSpPr>
         <p:spPr>
           <a:xfrm>
-            <a:off x="566928" y="5120640"/>
-            <a:ext cx="11018520" cy="914400"/>
+            <a:off x="566928" y="5486400"/>
+            <a:ext cx="11018520" cy="822960"/>
           </a:xfrm>
           <a:prstGeom prst="rect">
             <a:avLst/>
@@ -16456,7 +16456,7 @@
                     <a:lstStyle/>
                     <a:p>
                       <a:r>
-                        <a:rPr sz="950" b="0">
+                        <a:rPr sz="1050" b="0">
                           <a:solidFill>
                             <a:srgbClr val="FFFFFF"/>
                           </a:solidFill>
@@ -16478,7 +16478,7 @@
                     <a:lstStyle/>
                     <a:p>
                       <a:r>
-                        <a:rPr sz="950" b="0">
+                        <a:rPr sz="1050" b="0">
                           <a:solidFill>
                             <a:srgbClr val="FFFFFF"/>
                           </a:solidFill>
@@ -16500,7 +16500,7 @@
                     <a:lstStyle/>
                     <a:p>
                       <a:r>
-                        <a:rPr sz="950" b="0">
+                        <a:rPr sz="1050" b="0">
                           <a:solidFill>
                             <a:srgbClr val="FFFFFF"/>
                           </a:solidFill>
@@ -16522,7 +16522,7 @@
                     <a:lstStyle/>
                     <a:p>
                       <a:r>
-                        <a:rPr sz="950" b="0">
+                        <a:rPr sz="1050" b="0">
                           <a:solidFill>
                             <a:srgbClr val="FFFFFF"/>
                           </a:solidFill>
@@ -16546,7 +16546,7 @@
                     <a:lstStyle/>
                     <a:p>
                       <a:r>
-                        <a:rPr sz="950" b="0">
+                        <a:rPr sz="1050" b="0">
                           <a:solidFill>
                             <a:srgbClr val="181818"/>
                           </a:solidFill>
@@ -16568,7 +16568,7 @@
                     <a:lstStyle/>
                     <a:p>
                       <a:r>
-                        <a:rPr sz="950" b="0">
+                        <a:rPr sz="1050" b="0">
                           <a:solidFill>
                             <a:srgbClr val="181818"/>
                           </a:solidFill>
@@ -16590,7 +16590,7 @@
                     <a:lstStyle/>
                     <a:p>
                       <a:r>
-                        <a:rPr sz="950" b="0">
+                        <a:rPr sz="1050" b="0">
                           <a:solidFill>
                             <a:srgbClr val="181818"/>
                           </a:solidFill>
@@ -16612,7 +16612,7 @@
                     <a:lstStyle/>
                     <a:p>
                       <a:r>
-                        <a:rPr sz="950" b="0">
+                        <a:rPr sz="1050" b="0">
                           <a:solidFill>
                             <a:srgbClr val="181818"/>
                           </a:solidFill>
@@ -16636,7 +16636,7 @@
                     <a:lstStyle/>
                     <a:p>
                       <a:r>
-                        <a:rPr sz="950" b="0">
+                        <a:rPr sz="1050" b="0">
                           <a:solidFill>
                             <a:srgbClr val="181818"/>
                           </a:solidFill>
@@ -16658,7 +16658,7 @@
                     <a:lstStyle/>
                     <a:p>
                       <a:r>
-                        <a:rPr sz="950" b="0">
+                        <a:rPr sz="1050" b="0">
                           <a:solidFill>
                             <a:srgbClr val="181818"/>
                           </a:solidFill>
@@ -16680,7 +16680,7 @@
                     <a:lstStyle/>
                     <a:p>
                       <a:r>
-                        <a:rPr sz="950" b="0">
+                        <a:rPr sz="1050" b="0">
                           <a:solidFill>
                             <a:srgbClr val="181818"/>
                           </a:solidFill>
@@ -16702,7 +16702,7 @@
                     <a:lstStyle/>
                     <a:p>
                       <a:r>
-                        <a:rPr sz="950" b="0">
+                        <a:rPr sz="1050" b="0">
                           <a:solidFill>
                             <a:srgbClr val="181818"/>
                           </a:solidFill>
@@ -16726,7 +16726,7 @@
                     <a:lstStyle/>
                     <a:p>
                       <a:r>
-                        <a:rPr sz="950" b="0">
+                        <a:rPr sz="1050" b="0">
                           <a:solidFill>
                             <a:srgbClr val="181818"/>
                           </a:solidFill>
@@ -16748,7 +16748,7 @@
                     <a:lstStyle/>
                     <a:p>
                       <a:r>
-                        <a:rPr sz="950" b="0">
+                        <a:rPr sz="1050" b="0">
                           <a:solidFill>
                             <a:srgbClr val="181818"/>
                           </a:solidFill>
@@ -16770,7 +16770,7 @@
                     <a:lstStyle/>
                     <a:p>
                       <a:r>
-                        <a:rPr sz="950" b="0">
+                        <a:rPr sz="1050" b="0">
                           <a:solidFill>
                             <a:srgbClr val="181818"/>
                           </a:solidFill>
@@ -16792,7 +16792,7 @@
                     <a:lstStyle/>
                     <a:p>
                       <a:r>
-                        <a:rPr sz="950" b="0">
+                        <a:rPr sz="1050" b="0">
                           <a:solidFill>
                             <a:srgbClr val="181818"/>
                           </a:solidFill>
@@ -16821,7 +16821,7 @@
         </p:nvSpPr>
         <p:spPr>
           <a:xfrm>
-            <a:off x="566928" y="4343400"/>
+            <a:off x="566928" y="4663440"/>
             <a:ext cx="11018520" cy="822960"/>
           </a:xfrm>
           <a:prstGeom prst="rect">
@@ -16860,8 +16860,8 @@
         </p:nvSpPr>
         <p:spPr>
           <a:xfrm>
-            <a:off x="566928" y="5257800"/>
-            <a:ext cx="11018520" cy="914400"/>
+            <a:off x="566928" y="5486400"/>
+            <a:ext cx="11018520" cy="822960"/>
           </a:xfrm>
           <a:prstGeom prst="rect">
             <a:avLst/>
@@ -17114,7 +17114,7 @@
               </a:spcAft>
             </a:pPr>
             <a:r>
-              <a:rPr sz="1150">
+              <a:rPr sz="1250">
                 <a:solidFill>
                   <a:srgbClr val="181818"/>
                 </a:solidFill>
@@ -17130,7 +17130,7 @@
               </a:spcAft>
             </a:pPr>
             <a:r>
-              <a:rPr sz="1150">
+              <a:rPr sz="1250">
                 <a:solidFill>
                   <a:srgbClr val="181818"/>
                 </a:solidFill>
@@ -17146,7 +17146,7 @@
               </a:spcAft>
             </a:pPr>
             <a:r>
-              <a:rPr sz="1150">
+              <a:rPr sz="1250">
                 <a:solidFill>
                   <a:srgbClr val="181818"/>
                 </a:solidFill>
@@ -17162,7 +17162,7 @@
               </a:spcAft>
             </a:pPr>
             <a:r>
-              <a:rPr sz="1150">
+              <a:rPr sz="1250">
                 <a:solidFill>
                   <a:srgbClr val="181818"/>
                 </a:solidFill>
@@ -17178,7 +17178,7 @@
               </a:spcAft>
             </a:pPr>
             <a:r>
-              <a:rPr sz="1150">
+              <a:rPr sz="1250">
                 <a:solidFill>
                   <a:srgbClr val="181818"/>
                 </a:solidFill>
@@ -17263,7 +17263,7 @@
               </a:lnSpc>
             </a:pPr>
             <a:r>
-              <a:rPr sz="1050" b="0">
+              <a:rPr sz="1150" b="0">
                 <a:solidFill>
                   <a:srgbClr val="303030"/>
                 </a:solidFill>
@@ -17279,7 +17279,7 @@
               </a:lnSpc>
             </a:pPr>
             <a:r>
-              <a:rPr sz="1050" b="0">
+              <a:rPr sz="1150" b="0">
                 <a:solidFill>
                   <a:srgbClr val="303030"/>
                 </a:solidFill>
@@ -17295,7 +17295,7 @@
               </a:lnSpc>
             </a:pPr>
             <a:r>
-              <a:rPr sz="1050" b="0">
+              <a:rPr sz="1150" b="0">
                 <a:solidFill>
                   <a:srgbClr val="303030"/>
                 </a:solidFill>
@@ -17311,7 +17311,7 @@
               </a:lnSpc>
             </a:pPr>
             <a:r>
-              <a:rPr sz="1050" b="0">
+              <a:rPr sz="1150" b="0">
                 <a:solidFill>
                   <a:srgbClr val="303030"/>
                 </a:solidFill>
@@ -17327,7 +17327,7 @@
               </a:lnSpc>
             </a:pPr>
             <a:r>
-              <a:rPr sz="1050" b="0">
+              <a:rPr sz="1150" b="0">
                 <a:solidFill>
                   <a:srgbClr val="303030"/>
                 </a:solidFill>
@@ -17343,7 +17343,7 @@
               </a:lnSpc>
             </a:pPr>
             <a:r>
-              <a:rPr sz="1050" b="0">
+              <a:rPr sz="1150" b="0">
                 <a:solidFill>
                   <a:srgbClr val="303030"/>
                 </a:solidFill>
@@ -17359,7 +17359,7 @@
               </a:lnSpc>
             </a:pPr>
             <a:r>
-              <a:rPr sz="1050" b="0">
+              <a:rPr sz="1150" b="0">
                 <a:solidFill>
                   <a:srgbClr val="303030"/>
                 </a:solidFill>
@@ -17375,7 +17375,7 @@
               </a:lnSpc>
             </a:pPr>
             <a:r>
-              <a:rPr sz="1050" b="0">
+              <a:rPr sz="1150" b="0">
                 <a:solidFill>
                   <a:srgbClr val="303030"/>
                 </a:solidFill>
@@ -17391,7 +17391,7 @@
               </a:lnSpc>
             </a:pPr>
             <a:r>
-              <a:rPr sz="1050" b="0">
+              <a:rPr sz="1150" b="0">
                 <a:solidFill>
                   <a:srgbClr val="303030"/>
                 </a:solidFill>
@@ -17469,7 +17469,7 @@
               </a:spcAft>
             </a:pPr>
             <a:r>
-              <a:rPr sz="1100">
+              <a:rPr sz="1150">
                 <a:solidFill>
                   <a:srgbClr val="181818"/>
                 </a:solidFill>
@@ -17485,7 +17485,7 @@
               </a:spcAft>
             </a:pPr>
             <a:r>
-              <a:rPr sz="1100">
+              <a:rPr sz="1150">
                 <a:solidFill>
                   <a:srgbClr val="181818"/>
                 </a:solidFill>
@@ -17501,7 +17501,7 @@
               </a:spcAft>
             </a:pPr>
             <a:r>
-              <a:rPr sz="1100">
+              <a:rPr sz="1150">
                 <a:solidFill>
                   <a:srgbClr val="181818"/>
                 </a:solidFill>
@@ -17698,7 +17698,7 @@
                     <a:lstStyle/>
                     <a:p>
                       <a:r>
-                        <a:rPr sz="1000" b="0">
+                        <a:rPr sz="1100" b="0">
                           <a:solidFill>
                             <a:srgbClr val="FFFFFF"/>
                           </a:solidFill>
@@ -17720,7 +17720,7 @@
                     <a:lstStyle/>
                     <a:p>
                       <a:r>
-                        <a:rPr sz="1000" b="0">
+                        <a:rPr sz="1100" b="0">
                           <a:solidFill>
                             <a:srgbClr val="FFFFFF"/>
                           </a:solidFill>
@@ -17742,7 +17742,7 @@
                     <a:lstStyle/>
                     <a:p>
                       <a:r>
-                        <a:rPr sz="1000" b="0">
+                        <a:rPr sz="1100" b="0">
                           <a:solidFill>
                             <a:srgbClr val="FFFFFF"/>
                           </a:solidFill>
@@ -17766,7 +17766,7 @@
                     <a:lstStyle/>
                     <a:p>
                       <a:r>
-                        <a:rPr sz="1000" b="0">
+                        <a:rPr sz="1100" b="0">
                           <a:solidFill>
                             <a:srgbClr val="181818"/>
                           </a:solidFill>
@@ -17788,7 +17788,7 @@
                     <a:lstStyle/>
                     <a:p>
                       <a:r>
-                        <a:rPr sz="1000" b="0">
+                        <a:rPr sz="1100" b="0">
                           <a:solidFill>
                             <a:srgbClr val="181818"/>
                           </a:solidFill>
@@ -17810,7 +17810,7 @@
                     <a:lstStyle/>
                     <a:p>
                       <a:r>
-                        <a:rPr sz="1000" b="0">
+                        <a:rPr sz="1100" b="0">
                           <a:solidFill>
                             <a:srgbClr val="181818"/>
                           </a:solidFill>
@@ -17834,7 +17834,7 @@
                     <a:lstStyle/>
                     <a:p>
                       <a:r>
-                        <a:rPr sz="1000" b="0">
+                        <a:rPr sz="1100" b="0">
                           <a:solidFill>
                             <a:srgbClr val="181818"/>
                           </a:solidFill>
@@ -17856,7 +17856,7 @@
                     <a:lstStyle/>
                     <a:p>
                       <a:r>
-                        <a:rPr sz="1000" b="0">
+                        <a:rPr sz="1100" b="0">
                           <a:solidFill>
                             <a:srgbClr val="181818"/>
                           </a:solidFill>
@@ -17878,7 +17878,7 @@
                     <a:lstStyle/>
                     <a:p>
                       <a:r>
-                        <a:rPr sz="1000" b="0">
+                        <a:rPr sz="1100" b="0">
                           <a:solidFill>
                             <a:srgbClr val="181818"/>
                           </a:solidFill>
@@ -17907,7 +17907,7 @@
                     <a:lstStyle/>
                     <a:p>
                       <a:r>
-                        <a:rPr sz="1000" b="0">
+                        <a:rPr sz="1100" b="0">
                           <a:solidFill>
                             <a:srgbClr val="181818"/>
                           </a:solidFill>
@@ -17929,7 +17929,7 @@
                     <a:lstStyle/>
                     <a:p>
                       <a:r>
-                        <a:rPr sz="1000" b="0">
+                        <a:rPr sz="1100" b="0">
                           <a:solidFill>
                             <a:srgbClr val="181818"/>
                           </a:solidFill>
@@ -17956,7 +17956,7 @@
                     <a:lstStyle/>
                     <a:p>
                       <a:r>
-                        <a:rPr sz="1000" b="0">
+                        <a:rPr sz="1100" b="0">
                           <a:solidFill>
                             <a:srgbClr val="181818"/>
                           </a:solidFill>
@@ -17980,7 +17980,7 @@
                     <a:lstStyle/>
                     <a:p>
                       <a:r>
-                        <a:rPr sz="1000" b="0">
+                        <a:rPr sz="1100" b="0">
                           <a:solidFill>
                             <a:srgbClr val="181818"/>
                           </a:solidFill>
@@ -18002,7 +18002,7 @@
                     <a:lstStyle/>
                     <a:p>
                       <a:r>
-                        <a:rPr sz="1000" b="0">
+                        <a:rPr sz="1100" b="0">
                           <a:solidFill>
                             <a:srgbClr val="181818"/>
                           </a:solidFill>
@@ -18024,7 +18024,7 @@
                     <a:lstStyle/>
                     <a:p>
                       <a:r>
-                        <a:rPr sz="1000" b="0">
+                        <a:rPr sz="1100" b="0">
                           <a:solidFill>
                             <a:srgbClr val="181818"/>
                           </a:solidFill>
@@ -18053,7 +18053,7 @@
         </p:nvSpPr>
         <p:spPr>
           <a:xfrm>
-            <a:off x="566928" y="4480560"/>
+            <a:off x="566928" y="4754880"/>
             <a:ext cx="11018520" cy="731520"/>
           </a:xfrm>
           <a:prstGeom prst="rect">
@@ -18092,8 +18092,8 @@
         </p:nvSpPr>
         <p:spPr>
           <a:xfrm>
-            <a:off x="566928" y="5303520"/>
-            <a:ext cx="11018520" cy="822960"/>
+            <a:off x="566928" y="5532120"/>
+            <a:ext cx="11018520" cy="777240"/>
           </a:xfrm>
           <a:prstGeom prst="rect">
             <a:avLst/>
@@ -18431,7 +18431,7 @@
               </a:lnSpc>
             </a:pPr>
             <a:r>
-              <a:rPr sz="1050" b="0">
+              <a:rPr sz="1100" b="0">
                 <a:solidFill>
                   <a:srgbClr val="303030"/>
                 </a:solidFill>
@@ -18447,7 +18447,7 @@
               </a:lnSpc>
             </a:pPr>
             <a:r>
-              <a:rPr sz="1050" b="0">
+              <a:rPr sz="1100" b="0">
                 <a:solidFill>
                   <a:srgbClr val="303030"/>
                 </a:solidFill>
@@ -18463,7 +18463,7 @@
               </a:lnSpc>
             </a:pPr>
             <a:r>
-              <a:rPr sz="1050" b="0">
+              <a:rPr sz="1100" b="0">
                 <a:solidFill>
                   <a:srgbClr val="303030"/>
                 </a:solidFill>
@@ -18479,7 +18479,7 @@
               </a:lnSpc>
             </a:pPr>
             <a:r>
-              <a:rPr sz="1050" b="0">
+              <a:rPr sz="1100" b="0">
                 <a:solidFill>
                   <a:srgbClr val="303030"/>
                 </a:solidFill>
@@ -18495,7 +18495,7 @@
               </a:lnSpc>
             </a:pPr>
             <a:r>
-              <a:rPr sz="1050" b="0">
+              <a:rPr sz="1100" b="0">
                 <a:solidFill>
                   <a:srgbClr val="303030"/>
                 </a:solidFill>
@@ -18511,7 +18511,7 @@
               </a:lnSpc>
             </a:pPr>
             <a:r>
-              <a:rPr sz="1050" b="0">
+              <a:rPr sz="1100" b="0">
                 <a:solidFill>
                   <a:srgbClr val="303030"/>
                 </a:solidFill>
@@ -18527,7 +18527,7 @@
               </a:lnSpc>
             </a:pPr>
             <a:r>
-              <a:rPr sz="1050" b="0">
+              <a:rPr sz="1100" b="0">
                 <a:solidFill>
                   <a:srgbClr val="303030"/>
                 </a:solidFill>
@@ -18543,7 +18543,7 @@
               </a:lnSpc>
             </a:pPr>
             <a:r>
-              <a:rPr sz="1050" b="0">
+              <a:rPr sz="1100" b="0">
                 <a:solidFill>
                   <a:srgbClr val="303030"/>
                 </a:solidFill>
@@ -18559,7 +18559,7 @@
               </a:lnSpc>
             </a:pPr>
             <a:r>
-              <a:rPr sz="1050" b="0">
+              <a:rPr sz="1100" b="0">
                 <a:solidFill>
                   <a:srgbClr val="303030"/>
                 </a:solidFill>
@@ -18598,7 +18598,7 @@
               </a:spcAft>
             </a:pPr>
             <a:r>
-              <a:rPr sz="1100">
+              <a:rPr sz="1150">
                 <a:solidFill>
                   <a:srgbClr val="181818"/>
                 </a:solidFill>
@@ -18614,7 +18614,7 @@
               </a:spcAft>
             </a:pPr>
             <a:r>
-              <a:rPr sz="1100">
+              <a:rPr sz="1150">
                 <a:solidFill>
                   <a:srgbClr val="181818"/>
                 </a:solidFill>
@@ -18630,7 +18630,7 @@
               </a:spcAft>
             </a:pPr>
             <a:r>
-              <a:rPr sz="1100">
+              <a:rPr sz="1150">
                 <a:solidFill>
                   <a:srgbClr val="181818"/>
                 </a:solidFill>
@@ -18688,7 +18688,7 @@
         </p:nvSpPr>
         <p:spPr>
           <a:xfrm>
-            <a:off x="566928" y="5120640"/>
+            <a:off x="566928" y="5074920"/>
             <a:ext cx="11018520" cy="4754880"/>
           </a:xfrm>
           <a:prstGeom prst="rect">
@@ -18708,7 +18708,7 @@
               </a:spcAft>
             </a:pPr>
             <a:r>
-              <a:rPr sz="1050">
+              <a:rPr sz="1100">
                 <a:solidFill>
                   <a:srgbClr val="181818"/>
                 </a:solidFill>
@@ -18724,7 +18724,7 @@
               </a:spcAft>
             </a:pPr>
             <a:r>
-              <a:rPr sz="1050">
+              <a:rPr sz="1100">
                 <a:solidFill>
                   <a:srgbClr val="181818"/>
                 </a:solidFill>
@@ -18740,7 +18740,7 @@
               </a:spcAft>
             </a:pPr>
             <a:r>
-              <a:rPr sz="1050">
+              <a:rPr sz="1100">
                 <a:solidFill>
                   <a:srgbClr val="181818"/>
                 </a:solidFill>
@@ -18938,7 +18938,7 @@
                     <a:lstStyle/>
                     <a:p>
                       <a:r>
-                        <a:rPr sz="1000" b="0">
+                        <a:rPr sz="1100" b="0">
                           <a:solidFill>
                             <a:srgbClr val="FFFFFF"/>
                           </a:solidFill>
@@ -18960,7 +18960,7 @@
                     <a:lstStyle/>
                     <a:p>
                       <a:r>
-                        <a:rPr sz="1000" b="0">
+                        <a:rPr sz="1100" b="0">
                           <a:solidFill>
                             <a:srgbClr val="FFFFFF"/>
                           </a:solidFill>
@@ -18982,7 +18982,7 @@
                     <a:lstStyle/>
                     <a:p>
                       <a:r>
-                        <a:rPr sz="1000" b="0">
+                        <a:rPr sz="1100" b="0">
                           <a:solidFill>
                             <a:srgbClr val="FFFFFF"/>
                           </a:solidFill>
@@ -19004,7 +19004,7 @@
                     <a:lstStyle/>
                     <a:p>
                       <a:r>
-                        <a:rPr sz="1000" b="0">
+                        <a:rPr sz="1100" b="0">
                           <a:solidFill>
                             <a:srgbClr val="FFFFFF"/>
                           </a:solidFill>
@@ -19028,7 +19028,7 @@
                     <a:lstStyle/>
                     <a:p>
                       <a:r>
-                        <a:rPr sz="1000" b="0">
+                        <a:rPr sz="1100" b="0">
                           <a:solidFill>
                             <a:srgbClr val="181818"/>
                           </a:solidFill>
@@ -19050,7 +19050,7 @@
                     <a:lstStyle/>
                     <a:p>
                       <a:r>
-                        <a:rPr sz="1000" b="0">
+                        <a:rPr sz="1100" b="0">
                           <a:solidFill>
                             <a:srgbClr val="181818"/>
                           </a:solidFill>
@@ -19072,7 +19072,7 @@
                     <a:lstStyle/>
                     <a:p>
                       <a:r>
-                        <a:rPr sz="1000" b="0">
+                        <a:rPr sz="1100" b="0">
                           <a:solidFill>
                             <a:srgbClr val="181818"/>
                           </a:solidFill>
@@ -19094,7 +19094,7 @@
                     <a:lstStyle/>
                     <a:p>
                       <a:r>
-                        <a:rPr sz="1000" b="0">
+                        <a:rPr sz="1100" b="0">
                           <a:solidFill>
                             <a:srgbClr val="181818"/>
                           </a:solidFill>
@@ -19118,7 +19118,7 @@
                     <a:lstStyle/>
                     <a:p>
                       <a:r>
-                        <a:rPr sz="1000" b="0">
+                        <a:rPr sz="1100" b="0">
                           <a:solidFill>
                             <a:srgbClr val="181818"/>
                           </a:solidFill>
@@ -19140,7 +19140,7 @@
                     <a:lstStyle/>
                     <a:p>
                       <a:r>
-                        <a:rPr sz="1000" b="0">
+                        <a:rPr sz="1100" b="0">
                           <a:solidFill>
                             <a:srgbClr val="181818"/>
                           </a:solidFill>
@@ -19162,7 +19162,7 @@
                     <a:lstStyle/>
                     <a:p>
                       <a:r>
-                        <a:rPr sz="1000" b="0">
+                        <a:rPr sz="1100" b="0">
                           <a:solidFill>
                             <a:srgbClr val="181818"/>
                           </a:solidFill>
@@ -19184,7 +19184,7 @@
                     <a:lstStyle/>
                     <a:p>
                       <a:r>
-                        <a:rPr sz="1000" b="0">
+                        <a:rPr sz="1100" b="0">
                           <a:solidFill>
                             <a:srgbClr val="181818"/>
                           </a:solidFill>
@@ -19208,7 +19208,7 @@
                     <a:lstStyle/>
                     <a:p>
                       <a:r>
-                        <a:rPr sz="1000" b="0">
+                        <a:rPr sz="1100" b="0">
                           <a:solidFill>
                             <a:srgbClr val="181818"/>
                           </a:solidFill>
@@ -19230,7 +19230,7 @@
                     <a:lstStyle/>
                     <a:p>
                       <a:r>
-                        <a:rPr sz="1000" b="0">
+                        <a:rPr sz="1100" b="0">
                           <a:solidFill>
                             <a:srgbClr val="181818"/>
                           </a:solidFill>
@@ -19252,7 +19252,7 @@
                     <a:lstStyle/>
                     <a:p>
                       <a:r>
-                        <a:rPr sz="1000" b="0">
+                        <a:rPr sz="1100" b="0">
                           <a:solidFill>
                             <a:srgbClr val="181818"/>
                           </a:solidFill>
@@ -19274,7 +19274,7 @@
                     <a:lstStyle/>
                     <a:p>
                       <a:r>
-                        <a:rPr sz="1000" b="0">
+                        <a:rPr sz="1100" b="0">
                           <a:solidFill>
                             <a:srgbClr val="181818"/>
                           </a:solidFill>
@@ -19298,7 +19298,7 @@
                     <a:lstStyle/>
                     <a:p>
                       <a:r>
-                        <a:rPr sz="1000" b="0">
+                        <a:rPr sz="1100" b="0">
                           <a:solidFill>
                             <a:srgbClr val="181818"/>
                           </a:solidFill>
@@ -19320,7 +19320,7 @@
                     <a:lstStyle/>
                     <a:p>
                       <a:r>
-                        <a:rPr sz="1000" b="0">
+                        <a:rPr sz="1100" b="0">
                           <a:solidFill>
                             <a:srgbClr val="181818"/>
                           </a:solidFill>
@@ -19342,7 +19342,7 @@
                     <a:lstStyle/>
                     <a:p>
                       <a:r>
-                        <a:rPr sz="1000" b="0">
+                        <a:rPr sz="1100" b="0">
                           <a:solidFill>
                             <a:srgbClr val="181818"/>
                           </a:solidFill>
@@ -19364,7 +19364,7 @@
                     <a:lstStyle/>
                     <a:p>
                       <a:r>
-                        <a:rPr sz="1000" b="0">
+                        <a:rPr sz="1100" b="0">
                           <a:solidFill>
                             <a:srgbClr val="181818"/>
                           </a:solidFill>
@@ -19388,7 +19388,7 @@
                     <a:lstStyle/>
                     <a:p>
                       <a:r>
-                        <a:rPr sz="1000" b="0">
+                        <a:rPr sz="1100" b="0">
                           <a:solidFill>
                             <a:srgbClr val="181818"/>
                           </a:solidFill>
@@ -19410,7 +19410,7 @@
                     <a:lstStyle/>
                     <a:p>
                       <a:r>
-                        <a:rPr sz="1000" b="0">
+                        <a:rPr sz="1100" b="0">
                           <a:solidFill>
                             <a:srgbClr val="181818"/>
                           </a:solidFill>
@@ -19432,7 +19432,7 @@
                     <a:lstStyle/>
                     <a:p>
                       <a:r>
-                        <a:rPr sz="1000" b="0">
+                        <a:rPr sz="1100" b="0">
                           <a:solidFill>
                             <a:srgbClr val="181818"/>
                           </a:solidFill>
@@ -19454,7 +19454,7 @@
                     <a:lstStyle/>
                     <a:p>
                       <a:r>
-                        <a:rPr sz="1000" b="0">
+                        <a:rPr sz="1100" b="0">
                           <a:solidFill>
                             <a:srgbClr val="181818"/>
                           </a:solidFill>
@@ -19483,7 +19483,7 @@
         </p:nvSpPr>
         <p:spPr>
           <a:xfrm>
-            <a:off x="566928" y="4709160"/>
+            <a:off x="566928" y="4937760"/>
             <a:ext cx="11018520" cy="822960"/>
           </a:xfrm>
           <a:prstGeom prst="rect">
@@ -19822,7 +19822,7 @@
               </a:lnSpc>
             </a:pPr>
             <a:r>
-              <a:rPr sz="950" b="0">
+              <a:rPr sz="1100" b="0">
                 <a:solidFill>
                   <a:srgbClr val="303030"/>
                 </a:solidFill>
@@ -19838,7 +19838,7 @@
               </a:lnSpc>
             </a:pPr>
             <a:r>
-              <a:rPr sz="950" b="0">
+              <a:rPr sz="1100" b="0">
                 <a:solidFill>
                   <a:srgbClr val="303030"/>
                 </a:solidFill>
@@ -19854,7 +19854,7 @@
               </a:lnSpc>
             </a:pPr>
             <a:r>
-              <a:rPr sz="950" b="0">
+              <a:rPr sz="1100" b="0">
                 <a:solidFill>
                   <a:srgbClr val="303030"/>
                 </a:solidFill>
@@ -19870,7 +19870,7 @@
               </a:lnSpc>
             </a:pPr>
             <a:r>
-              <a:rPr sz="950" b="0">
+              <a:rPr sz="1100" b="0">
                 <a:solidFill>
                   <a:srgbClr val="303030"/>
                 </a:solidFill>
@@ -19886,7 +19886,7 @@
               </a:lnSpc>
             </a:pPr>
             <a:r>
-              <a:rPr sz="950" b="0">
+              <a:rPr sz="1100" b="0">
                 <a:solidFill>
                   <a:srgbClr val="303030"/>
                 </a:solidFill>
@@ -19902,7 +19902,7 @@
               </a:lnSpc>
             </a:pPr>
             <a:r>
-              <a:rPr sz="950" b="0">
+              <a:rPr sz="1100" b="0">
                 <a:solidFill>
                   <a:srgbClr val="303030"/>
                 </a:solidFill>
@@ -20026,7 +20026,7 @@
               </a:lnSpc>
             </a:pPr>
             <a:r>
-              <a:rPr sz="1700" b="1">
+              <a:rPr sz="1800" b="1">
                 <a:solidFill>
                   <a:srgbClr val="923826"/>
                 </a:solidFill>
@@ -20065,7 +20065,7 @@
               </a:lnSpc>
             </a:pPr>
             <a:r>
-              <a:rPr sz="900" b="0">
+              <a:rPr sz="1050" b="0">
                 <a:solidFill>
                   <a:srgbClr val="595959"/>
                 </a:solidFill>
@@ -20081,7 +20081,7 @@
               </a:lnSpc>
             </a:pPr>
             <a:r>
-              <a:rPr sz="900" b="0">
+              <a:rPr sz="1050" b="0">
                 <a:solidFill>
                   <a:srgbClr val="595959"/>
                 </a:solidFill>
@@ -20166,7 +20166,7 @@
               </a:lnSpc>
             </a:pPr>
             <a:r>
-              <a:rPr sz="1700" b="1">
+              <a:rPr sz="1800" b="1">
                 <a:solidFill>
                   <a:srgbClr val="923826"/>
                 </a:solidFill>
@@ -20205,7 +20205,7 @@
               </a:lnSpc>
             </a:pPr>
             <a:r>
-              <a:rPr sz="900" b="0">
+              <a:rPr sz="1050" b="0">
                 <a:solidFill>
                   <a:srgbClr val="595959"/>
                 </a:solidFill>
@@ -20221,7 +20221,7 @@
               </a:lnSpc>
             </a:pPr>
             <a:r>
-              <a:rPr sz="900" b="0">
+              <a:rPr sz="1050" b="0">
                 <a:solidFill>
                   <a:srgbClr val="595959"/>
                 </a:solidFill>
@@ -20306,7 +20306,7 @@
               </a:lnSpc>
             </a:pPr>
             <a:r>
-              <a:rPr sz="1700" b="1">
+              <a:rPr sz="1800" b="1">
                 <a:solidFill>
                   <a:srgbClr val="923826"/>
                 </a:solidFill>
@@ -20345,7 +20345,7 @@
               </a:lnSpc>
             </a:pPr>
             <a:r>
-              <a:rPr sz="900" b="0">
+              <a:rPr sz="1050" b="0">
                 <a:solidFill>
                   <a:srgbClr val="595959"/>
                 </a:solidFill>
@@ -20361,7 +20361,7 @@
               </a:lnSpc>
             </a:pPr>
             <a:r>
-              <a:rPr sz="900" b="0">
+              <a:rPr sz="1050" b="0">
                 <a:solidFill>
                   <a:srgbClr val="595959"/>
                 </a:solidFill>
@@ -20446,7 +20446,7 @@
               </a:lnSpc>
             </a:pPr>
             <a:r>
-              <a:rPr sz="1700" b="1">
+              <a:rPr sz="1800" b="1">
                 <a:solidFill>
                   <a:srgbClr val="923826"/>
                 </a:solidFill>
@@ -20485,7 +20485,7 @@
               </a:lnSpc>
             </a:pPr>
             <a:r>
-              <a:rPr sz="900" b="0">
+              <a:rPr sz="1050" b="0">
                 <a:solidFill>
                   <a:srgbClr val="595959"/>
                 </a:solidFill>
@@ -20501,7 +20501,7 @@
               </a:lnSpc>
             </a:pPr>
             <a:r>
-              <a:rPr sz="900" b="0">
+              <a:rPr sz="1050" b="0">
                 <a:solidFill>
                   <a:srgbClr val="595959"/>
                 </a:solidFill>
@@ -20586,7 +20586,7 @@
               </a:lnSpc>
             </a:pPr>
             <a:r>
-              <a:rPr sz="1700" b="1">
+              <a:rPr sz="1800" b="1">
                 <a:solidFill>
                   <a:srgbClr val="923826"/>
                 </a:solidFill>
@@ -20625,7 +20625,7 @@
               </a:lnSpc>
             </a:pPr>
             <a:r>
-              <a:rPr sz="900" b="0">
+              <a:rPr sz="1050" b="0">
                 <a:solidFill>
                   <a:srgbClr val="595959"/>
                 </a:solidFill>
@@ -20710,7 +20710,7 @@
               </a:lnSpc>
             </a:pPr>
             <a:r>
-              <a:rPr sz="1700" b="1">
+              <a:rPr sz="1800" b="1">
                 <a:solidFill>
                   <a:srgbClr val="923826"/>
                 </a:solidFill>
@@ -20749,7 +20749,7 @@
               </a:lnSpc>
             </a:pPr>
             <a:r>
-              <a:rPr sz="900" b="0">
+              <a:rPr sz="1050" b="0">
                 <a:solidFill>
                   <a:srgbClr val="595959"/>
                 </a:solidFill>
@@ -20834,7 +20834,7 @@
               </a:lnSpc>
             </a:pPr>
             <a:r>
-              <a:rPr sz="1700" b="1">
+              <a:rPr sz="1800" b="1">
                 <a:solidFill>
                   <a:srgbClr val="923826"/>
                 </a:solidFill>
@@ -20873,7 +20873,7 @@
               </a:lnSpc>
             </a:pPr>
             <a:r>
-              <a:rPr sz="900" b="0">
+              <a:rPr sz="1050" b="0">
                 <a:solidFill>
                   <a:srgbClr val="595959"/>
                 </a:solidFill>
@@ -20958,7 +20958,7 @@
               </a:lnSpc>
             </a:pPr>
             <a:r>
-              <a:rPr sz="1700" b="1">
+              <a:rPr sz="1800" b="1">
                 <a:solidFill>
                   <a:srgbClr val="923826"/>
                 </a:solidFill>
@@ -20997,7 +20997,7 @@
               </a:lnSpc>
             </a:pPr>
             <a:r>
-              <a:rPr sz="900" b="0">
+              <a:rPr sz="1050" b="0">
                 <a:solidFill>
                   <a:srgbClr val="595959"/>
                 </a:solidFill>
@@ -21013,7 +21013,7 @@
               </a:lnSpc>
             </a:pPr>
             <a:r>
-              <a:rPr sz="900" b="0">
+              <a:rPr sz="1050" b="0">
                 <a:solidFill>
                   <a:srgbClr val="595959"/>
                 </a:solidFill>
@@ -21052,7 +21052,7 @@
               </a:spcAft>
             </a:pPr>
             <a:r>
-              <a:rPr sz="1050">
+              <a:rPr sz="1150">
                 <a:solidFill>
                   <a:srgbClr val="181818"/>
                 </a:solidFill>
@@ -21068,7 +21068,7 @@
               </a:spcAft>
             </a:pPr>
             <a:r>
-              <a:rPr sz="1050">
+              <a:rPr sz="1150">
                 <a:solidFill>
                   <a:srgbClr val="181818"/>
                 </a:solidFill>
@@ -21084,7 +21084,7 @@
               </a:spcAft>
             </a:pPr>
             <a:r>
-              <a:rPr sz="1050">
+              <a:rPr sz="1150">
                 <a:solidFill>
                   <a:srgbClr val="181818"/>
                 </a:solidFill>
@@ -21432,7 +21432,7 @@
               </a:spcAft>
             </a:pPr>
             <a:r>
-              <a:rPr sz="1000">
+              <a:rPr sz="1100">
                 <a:solidFill>
                   <a:srgbClr val="181818"/>
                 </a:solidFill>
@@ -21448,7 +21448,7 @@
               </a:spcAft>
             </a:pPr>
             <a:r>
-              <a:rPr sz="1000">
+              <a:rPr sz="1100">
                 <a:solidFill>
                   <a:srgbClr val="181818"/>
                 </a:solidFill>
@@ -21464,7 +21464,7 @@
               </a:spcAft>
             </a:pPr>
             <a:r>
-              <a:rPr sz="1000">
+              <a:rPr sz="1100">
                 <a:solidFill>
                   <a:srgbClr val="181818"/>
                 </a:solidFill>
@@ -21480,7 +21480,7 @@
               </a:spcAft>
             </a:pPr>
             <a:r>
-              <a:rPr sz="1000">
+              <a:rPr sz="1100">
                 <a:solidFill>
                   <a:srgbClr val="181818"/>
                 </a:solidFill>
@@ -21496,7 +21496,7 @@
               </a:spcAft>
             </a:pPr>
             <a:r>
-              <a:rPr sz="1000">
+              <a:rPr sz="1100">
                 <a:solidFill>
                   <a:srgbClr val="181818"/>
                 </a:solidFill>

--- a/Саратовская_область_презентация_СПбГУ.pptx
+++ b/Саратовская_область_презентация_СПбГУ.pptx
@@ -10316,7 +10316,7 @@
                     <a:lstStyle/>
                     <a:p>
                       <a:r>
-                        <a:rPr sz="1150" b="0">
+                        <a:rPr sz="1050" b="0">
                           <a:solidFill>
                             <a:srgbClr val="FFFFFF"/>
                           </a:solidFill>
@@ -10338,7 +10338,7 @@
                     <a:lstStyle/>
                     <a:p>
                       <a:r>
-                        <a:rPr sz="1150" b="0">
+                        <a:rPr sz="1050" b="0">
                           <a:solidFill>
                             <a:srgbClr val="FFFFFF"/>
                           </a:solidFill>
@@ -10360,7 +10360,7 @@
                     <a:lstStyle/>
                     <a:p>
                       <a:r>
-                        <a:rPr sz="1150" b="0">
+                        <a:rPr sz="1050" b="0">
                           <a:solidFill>
                             <a:srgbClr val="FFFFFF"/>
                           </a:solidFill>
@@ -10384,7 +10384,7 @@
                     <a:lstStyle/>
                     <a:p>
                       <a:r>
-                        <a:rPr sz="1150" b="0">
+                        <a:rPr sz="1050" b="0">
                           <a:solidFill>
                             <a:srgbClr val="181818"/>
                           </a:solidFill>
@@ -10406,7 +10406,7 @@
                     <a:lstStyle/>
                     <a:p>
                       <a:r>
-                        <a:rPr sz="1150" b="0">
+                        <a:rPr sz="1050" b="0">
                           <a:solidFill>
                             <a:srgbClr val="181818"/>
                           </a:solidFill>
@@ -10428,7 +10428,7 @@
                     <a:lstStyle/>
                     <a:p>
                       <a:r>
-                        <a:rPr sz="1150" b="0">
+                        <a:rPr sz="1050" b="0">
                           <a:solidFill>
                             <a:srgbClr val="181818"/>
                           </a:solidFill>
@@ -10452,7 +10452,7 @@
                     <a:lstStyle/>
                     <a:p>
                       <a:r>
-                        <a:rPr sz="1150" b="0">
+                        <a:rPr sz="1050" b="0">
                           <a:solidFill>
                             <a:srgbClr val="181818"/>
                           </a:solidFill>
@@ -10474,7 +10474,7 @@
                     <a:lstStyle/>
                     <a:p>
                       <a:r>
-                        <a:rPr sz="1150" b="0">
+                        <a:rPr sz="1050" b="0">
                           <a:solidFill>
                             <a:srgbClr val="181818"/>
                           </a:solidFill>
@@ -10496,7 +10496,7 @@
                     <a:lstStyle/>
                     <a:p>
                       <a:r>
-                        <a:rPr sz="1150" b="0">
+                        <a:rPr sz="1050" b="0">
                           <a:solidFill>
                             <a:srgbClr val="181818"/>
                           </a:solidFill>
@@ -10548,7 +10548,7 @@
                     <a:lstStyle/>
                     <a:p>
                       <a:r>
-                        <a:rPr sz="1150" b="0">
+                        <a:rPr sz="1050" b="0">
                           <a:solidFill>
                             <a:srgbClr val="FFFFFF"/>
                           </a:solidFill>
@@ -10570,7 +10570,7 @@
                     <a:lstStyle/>
                     <a:p>
                       <a:r>
-                        <a:rPr sz="1150" b="0">
+                        <a:rPr sz="1050" b="0">
                           <a:solidFill>
                             <a:srgbClr val="FFFFFF"/>
                           </a:solidFill>
@@ -10592,7 +10592,7 @@
                     <a:lstStyle/>
                     <a:p>
                       <a:r>
-                        <a:rPr sz="1150" b="0">
+                        <a:rPr sz="1050" b="0">
                           <a:solidFill>
                             <a:srgbClr val="FFFFFF"/>
                           </a:solidFill>
@@ -10614,7 +10614,7 @@
                     <a:lstStyle/>
                     <a:p>
                       <a:r>
-                        <a:rPr sz="1150" b="0">
+                        <a:rPr sz="1050" b="0">
                           <a:solidFill>
                             <a:srgbClr val="FFFFFF"/>
                           </a:solidFill>
@@ -10638,7 +10638,7 @@
                     <a:lstStyle/>
                     <a:p>
                       <a:r>
-                        <a:rPr sz="1150" b="0">
+                        <a:rPr sz="1050" b="0">
                           <a:solidFill>
                             <a:srgbClr val="181818"/>
                           </a:solidFill>
@@ -10660,7 +10660,7 @@
                     <a:lstStyle/>
                     <a:p>
                       <a:r>
-                        <a:rPr sz="1150" b="0">
+                        <a:rPr sz="1050" b="0">
                           <a:solidFill>
                             <a:srgbClr val="181818"/>
                           </a:solidFill>
@@ -10682,7 +10682,7 @@
                     <a:lstStyle/>
                     <a:p>
                       <a:r>
-                        <a:rPr sz="1150" b="0">
+                        <a:rPr sz="1050" b="0">
                           <a:solidFill>
                             <a:srgbClr val="181818"/>
                           </a:solidFill>
@@ -10704,7 +10704,7 @@
                     <a:lstStyle/>
                     <a:p>
                       <a:r>
-                        <a:rPr sz="1150" b="0">
+                        <a:rPr sz="1050" b="0">
                           <a:solidFill>
                             <a:srgbClr val="181818"/>
                           </a:solidFill>
@@ -10728,7 +10728,7 @@
                     <a:lstStyle/>
                     <a:p>
                       <a:r>
-                        <a:rPr sz="1150" b="0">
+                        <a:rPr sz="1050" b="0">
                           <a:solidFill>
                             <a:srgbClr val="181818"/>
                           </a:solidFill>
@@ -10750,7 +10750,7 @@
                     <a:lstStyle/>
                     <a:p>
                       <a:r>
-                        <a:rPr sz="1150" b="0">
+                        <a:rPr sz="1050" b="0">
                           <a:solidFill>
                             <a:srgbClr val="181818"/>
                           </a:solidFill>
@@ -10772,7 +10772,7 @@
                     <a:lstStyle/>
                     <a:p>
                       <a:r>
-                        <a:rPr sz="1150" b="0">
+                        <a:rPr sz="1050" b="0">
                           <a:solidFill>
                             <a:srgbClr val="181818"/>
                           </a:solidFill>
@@ -10794,7 +10794,7 @@
                     <a:lstStyle/>
                     <a:p>
                       <a:r>
-                        <a:rPr sz="1150" b="0">
+                        <a:rPr sz="1050" b="0">
                           <a:solidFill>
                             <a:srgbClr val="181818"/>
                           </a:solidFill>
@@ -10818,7 +10818,7 @@
                     <a:lstStyle/>
                     <a:p>
                       <a:r>
-                        <a:rPr sz="1150" b="0">
+                        <a:rPr sz="1050" b="0">
                           <a:solidFill>
                             <a:srgbClr val="181818"/>
                           </a:solidFill>
@@ -10840,7 +10840,7 @@
                     <a:lstStyle/>
                     <a:p>
                       <a:r>
-                        <a:rPr sz="1150" b="0">
+                        <a:rPr sz="1050" b="0">
                           <a:solidFill>
                             <a:srgbClr val="181818"/>
                           </a:solidFill>
@@ -10862,7 +10862,7 @@
                     <a:lstStyle/>
                     <a:p>
                       <a:r>
-                        <a:rPr sz="1150" b="0">
+                        <a:rPr sz="1050" b="0">
                           <a:solidFill>
                             <a:srgbClr val="181818"/>
                           </a:solidFill>
@@ -10884,7 +10884,7 @@
                     <a:lstStyle/>
                     <a:p>
                       <a:r>
-                        <a:rPr sz="1150" b="0">
+                        <a:rPr sz="1050" b="0">
                           <a:solidFill>
                             <a:srgbClr val="181818"/>
                           </a:solidFill>
@@ -10908,7 +10908,7 @@
                     <a:lstStyle/>
                     <a:p>
                       <a:r>
-                        <a:rPr sz="1150" b="0">
+                        <a:rPr sz="1050" b="0">
                           <a:solidFill>
                             <a:srgbClr val="181818"/>
                           </a:solidFill>
@@ -10930,7 +10930,7 @@
                     <a:lstStyle/>
                     <a:p>
                       <a:r>
-                        <a:rPr sz="1150" b="0">
+                        <a:rPr sz="1050" b="0">
                           <a:solidFill>
                             <a:srgbClr val="181818"/>
                           </a:solidFill>
@@ -10952,7 +10952,7 @@
                     <a:lstStyle/>
                     <a:p>
                       <a:r>
-                        <a:rPr sz="1150" b="0">
+                        <a:rPr sz="1050" b="0">
                           <a:solidFill>
                             <a:srgbClr val="181818"/>
                           </a:solidFill>
@@ -10974,7 +10974,7 @@
                     <a:lstStyle/>
                     <a:p>
                       <a:r>
-                        <a:rPr sz="1150" b="0">
+                        <a:rPr sz="1050" b="0">
                           <a:solidFill>
                             <a:srgbClr val="181818"/>
                           </a:solidFill>
@@ -14652,7 +14652,7 @@
                     <a:lstStyle/>
                     <a:p>
                       <a:r>
-                        <a:rPr sz="1100" b="0">
+                        <a:rPr sz="1050" b="0">
                           <a:solidFill>
                             <a:srgbClr val="FFFFFF"/>
                           </a:solidFill>
@@ -14674,7 +14674,7 @@
                     <a:lstStyle/>
                     <a:p>
                       <a:r>
-                        <a:rPr sz="1100" b="0">
+                        <a:rPr sz="1050" b="0">
                           <a:solidFill>
                             <a:srgbClr val="FFFFFF"/>
                           </a:solidFill>
@@ -14696,7 +14696,7 @@
                     <a:lstStyle/>
                     <a:p>
                       <a:r>
-                        <a:rPr sz="1100" b="0">
+                        <a:rPr sz="1050" b="0">
                           <a:solidFill>
                             <a:srgbClr val="FFFFFF"/>
                           </a:solidFill>
@@ -14720,7 +14720,7 @@
                     <a:lstStyle/>
                     <a:p>
                       <a:r>
-                        <a:rPr sz="1100" b="0">
+                        <a:rPr sz="1050" b="0">
                           <a:solidFill>
                             <a:srgbClr val="181818"/>
                           </a:solidFill>
@@ -14742,7 +14742,7 @@
                     <a:lstStyle/>
                     <a:p>
                       <a:r>
-                        <a:rPr sz="1100" b="0">
+                        <a:rPr sz="1050" b="0">
                           <a:solidFill>
                             <a:srgbClr val="181818"/>
                           </a:solidFill>
@@ -14764,7 +14764,7 @@
                     <a:lstStyle/>
                     <a:p>
                       <a:r>
-                        <a:rPr sz="1100" b="0">
+                        <a:rPr sz="1050" b="0">
                           <a:solidFill>
                             <a:srgbClr val="181818"/>
                           </a:solidFill>
@@ -14788,7 +14788,7 @@
                     <a:lstStyle/>
                     <a:p>
                       <a:r>
-                        <a:rPr sz="1100" b="0">
+                        <a:rPr sz="1050" b="0">
                           <a:solidFill>
                             <a:srgbClr val="181818"/>
                           </a:solidFill>
@@ -14810,7 +14810,7 @@
                     <a:lstStyle/>
                     <a:p>
                       <a:r>
-                        <a:rPr sz="1100" b="0">
+                        <a:rPr sz="1050" b="0">
                           <a:solidFill>
                             <a:srgbClr val="181818"/>
                           </a:solidFill>
@@ -14832,7 +14832,7 @@
                     <a:lstStyle/>
                     <a:p>
                       <a:r>
-                        <a:rPr sz="1100" b="0">
+                        <a:rPr sz="1050" b="0">
                           <a:solidFill>
                             <a:srgbClr val="181818"/>
                           </a:solidFill>
@@ -14856,7 +14856,7 @@
                     <a:lstStyle/>
                     <a:p>
                       <a:r>
-                        <a:rPr sz="1100" b="0">
+                        <a:rPr sz="1050" b="0">
                           <a:solidFill>
                             <a:srgbClr val="181818"/>
                           </a:solidFill>
@@ -14878,7 +14878,7 @@
                     <a:lstStyle/>
                     <a:p>
                       <a:r>
-                        <a:rPr sz="1100" b="0">
+                        <a:rPr sz="1050" b="0">
                           <a:solidFill>
                             <a:srgbClr val="181818"/>
                           </a:solidFill>
@@ -14900,7 +14900,7 @@
                     <a:lstStyle/>
                     <a:p>
                       <a:r>
-                        <a:rPr sz="1100" b="0">
+                        <a:rPr sz="1050" b="0">
                           <a:solidFill>
                             <a:srgbClr val="181818"/>
                           </a:solidFill>
@@ -14950,7 +14950,7 @@
                     <a:lstStyle/>
                     <a:p>
                       <a:r>
-                        <a:rPr sz="1100" b="0">
+                        <a:rPr sz="1050" b="0">
                           <a:solidFill>
                             <a:srgbClr val="FFFFFF"/>
                           </a:solidFill>
@@ -14972,7 +14972,7 @@
                     <a:lstStyle/>
                     <a:p>
                       <a:r>
-                        <a:rPr sz="1100" b="0">
+                        <a:rPr sz="1050" b="0">
                           <a:solidFill>
                             <a:srgbClr val="FFFFFF"/>
                           </a:solidFill>
@@ -14996,7 +14996,7 @@
                     <a:lstStyle/>
                     <a:p>
                       <a:r>
-                        <a:rPr sz="1100" b="0">
+                        <a:rPr sz="1050" b="0">
                           <a:solidFill>
                             <a:srgbClr val="181818"/>
                           </a:solidFill>
@@ -15018,7 +15018,7 @@
                     <a:lstStyle/>
                     <a:p>
                       <a:r>
-                        <a:rPr sz="1100" b="0">
+                        <a:rPr sz="1050" b="0">
                           <a:solidFill>
                             <a:srgbClr val="181818"/>
                           </a:solidFill>
@@ -15042,7 +15042,7 @@
                     <a:lstStyle/>
                     <a:p>
                       <a:r>
-                        <a:rPr sz="1100" b="0">
+                        <a:rPr sz="1050" b="0">
                           <a:solidFill>
                             <a:srgbClr val="181818"/>
                           </a:solidFill>
@@ -15064,7 +15064,7 @@
                     <a:lstStyle/>
                     <a:p>
                       <a:r>
-                        <a:rPr sz="1100" b="0">
+                        <a:rPr sz="1050" b="0">
                           <a:solidFill>
                             <a:srgbClr val="181818"/>
                           </a:solidFill>
@@ -15088,7 +15088,7 @@
                     <a:lstStyle/>
                     <a:p>
                       <a:r>
-                        <a:rPr sz="1100" b="0">
+                        <a:rPr sz="1050" b="0">
                           <a:solidFill>
                             <a:srgbClr val="181818"/>
                           </a:solidFill>
@@ -15110,7 +15110,7 @@
                     <a:lstStyle/>
                     <a:p>
                       <a:r>
-                        <a:rPr sz="1100" b="0">
+                        <a:rPr sz="1050" b="0">
                           <a:solidFill>
                             <a:srgbClr val="181818"/>
                           </a:solidFill>
@@ -15134,7 +15134,7 @@
                     <a:lstStyle/>
                     <a:p>
                       <a:r>
-                        <a:rPr sz="1100" b="0">
+                        <a:rPr sz="1050" b="0">
                           <a:solidFill>
                             <a:srgbClr val="181818"/>
                           </a:solidFill>
@@ -15156,7 +15156,7 @@
                     <a:lstStyle/>
                     <a:p>
                       <a:r>
-                        <a:rPr sz="1100" b="0">
+                        <a:rPr sz="1050" b="0">
                           <a:solidFill>
                             <a:srgbClr val="181818"/>
                           </a:solidFill>
@@ -15758,7 +15758,7 @@
                     <a:lstStyle/>
                     <a:p>
                       <a:r>
-                        <a:rPr sz="1000" b="0">
+                        <a:rPr sz="1050" b="0">
                           <a:solidFill>
                             <a:srgbClr val="FFFFFF"/>
                           </a:solidFill>
@@ -15780,7 +15780,7 @@
                     <a:lstStyle/>
                     <a:p>
                       <a:r>
-                        <a:rPr sz="1000" b="0">
+                        <a:rPr sz="1050" b="0">
                           <a:solidFill>
                             <a:srgbClr val="FFFFFF"/>
                           </a:solidFill>
@@ -15802,7 +15802,7 @@
                     <a:lstStyle/>
                     <a:p>
                       <a:r>
-                        <a:rPr sz="1000" b="0">
+                        <a:rPr sz="1050" b="0">
                           <a:solidFill>
                             <a:srgbClr val="FFFFFF"/>
                           </a:solidFill>
@@ -15824,7 +15824,7 @@
                     <a:lstStyle/>
                     <a:p>
                       <a:r>
-                        <a:rPr sz="1000" b="0">
+                        <a:rPr sz="1050" b="0">
                           <a:solidFill>
                             <a:srgbClr val="FFFFFF"/>
                           </a:solidFill>
@@ -15848,7 +15848,7 @@
                     <a:lstStyle/>
                     <a:p>
                       <a:r>
-                        <a:rPr sz="1000" b="0">
+                        <a:rPr sz="1050" b="0">
                           <a:solidFill>
                             <a:srgbClr val="181818"/>
                           </a:solidFill>
@@ -15870,7 +15870,7 @@
                     <a:lstStyle/>
                     <a:p>
                       <a:r>
-                        <a:rPr sz="1000" b="0">
+                        <a:rPr sz="1050" b="0">
                           <a:solidFill>
                             <a:srgbClr val="181818"/>
                           </a:solidFill>
@@ -15902,7 +15902,7 @@
                     <a:lstStyle/>
                     <a:p>
                       <a:r>
-                        <a:rPr sz="1000" b="0">
+                        <a:rPr sz="1050" b="0">
                           <a:solidFill>
                             <a:srgbClr val="181818"/>
                           </a:solidFill>
@@ -15924,7 +15924,7 @@
                     <a:lstStyle/>
                     <a:p>
                       <a:r>
-                        <a:rPr sz="1000" b="0">
+                        <a:rPr sz="1050" b="0">
                           <a:solidFill>
                             <a:srgbClr val="181818"/>
                           </a:solidFill>
@@ -15948,7 +15948,7 @@
                     <a:lstStyle/>
                     <a:p>
                       <a:r>
-                        <a:rPr sz="1000" b="0">
+                        <a:rPr sz="1050" b="0">
                           <a:solidFill>
                             <a:srgbClr val="181818"/>
                           </a:solidFill>
@@ -15970,7 +15970,7 @@
                     <a:lstStyle/>
                     <a:p>
                       <a:r>
-                        <a:rPr sz="1000" b="0">
+                        <a:rPr sz="1050" b="0">
                           <a:solidFill>
                             <a:srgbClr val="181818"/>
                           </a:solidFill>
@@ -15992,7 +15992,7 @@
                     <a:lstStyle/>
                     <a:p>
                       <a:r>
-                        <a:rPr sz="1000" b="0">
+                        <a:rPr sz="1050" b="0">
                           <a:solidFill>
                             <a:srgbClr val="181818"/>
                           </a:solidFill>
@@ -16014,7 +16014,7 @@
                     <a:lstStyle/>
                     <a:p>
                       <a:r>
-                        <a:rPr sz="1000" b="0">
+                        <a:rPr sz="1050" b="0">
                           <a:solidFill>
                             <a:srgbClr val="181818"/>
                           </a:solidFill>
@@ -16038,7 +16038,7 @@
                     <a:lstStyle/>
                     <a:p>
                       <a:r>
-                        <a:rPr sz="1000" b="0">
+                        <a:rPr sz="1050" b="0">
                           <a:solidFill>
                             <a:srgbClr val="181818"/>
                           </a:solidFill>
@@ -16060,7 +16060,7 @@
                     <a:lstStyle/>
                     <a:p>
                       <a:r>
-                        <a:rPr sz="1000" b="0">
+                        <a:rPr sz="1050" b="0">
                           <a:solidFill>
                             <a:srgbClr val="181818"/>
                           </a:solidFill>
@@ -16087,7 +16087,7 @@
                     <a:lstStyle/>
                     <a:p>
                       <a:r>
-                        <a:rPr sz="1000" b="0">
+                        <a:rPr sz="1050" b="0">
                           <a:solidFill>
                             <a:srgbClr val="181818"/>
                           </a:solidFill>
@@ -16109,7 +16109,7 @@
                     <a:lstStyle/>
                     <a:p>
                       <a:r>
-                        <a:rPr sz="1000" b="0">
+                        <a:rPr sz="1050" b="0">
                           <a:solidFill>
                             <a:srgbClr val="181818"/>
                           </a:solidFill>
@@ -16133,7 +16133,7 @@
                     <a:lstStyle/>
                     <a:p>
                       <a:r>
-                        <a:rPr sz="1000" b="0">
+                        <a:rPr sz="1050" b="0">
                           <a:solidFill>
                             <a:srgbClr val="181818"/>
                           </a:solidFill>
@@ -16155,7 +16155,7 @@
                     <a:lstStyle/>
                     <a:p>
                       <a:r>
-                        <a:rPr sz="1000" b="0">
+                        <a:rPr sz="1050" b="0">
                           <a:solidFill>
                             <a:srgbClr val="181818"/>
                           </a:solidFill>
@@ -16182,7 +16182,7 @@
                     <a:lstStyle/>
                     <a:p>
                       <a:r>
-                        <a:rPr sz="1000" b="0">
+                        <a:rPr sz="1050" b="0">
                           <a:solidFill>
                             <a:srgbClr val="181818"/>
                           </a:solidFill>
@@ -16204,7 +16204,7 @@
                     <a:lstStyle/>
                     <a:p>
                       <a:r>
-                        <a:rPr sz="1000" b="0">
+                        <a:rPr sz="1050" b="0">
                           <a:solidFill>
                             <a:srgbClr val="181818"/>
                           </a:solidFill>
@@ -17698,7 +17698,7 @@
                     <a:lstStyle/>
                     <a:p>
                       <a:r>
-                        <a:rPr sz="1100" b="0">
+                        <a:rPr sz="1050" b="0">
                           <a:solidFill>
                             <a:srgbClr val="FFFFFF"/>
                           </a:solidFill>
@@ -17720,7 +17720,7 @@
                     <a:lstStyle/>
                     <a:p>
                       <a:r>
-                        <a:rPr sz="1100" b="0">
+                        <a:rPr sz="1050" b="0">
                           <a:solidFill>
                             <a:srgbClr val="FFFFFF"/>
                           </a:solidFill>
@@ -17742,7 +17742,7 @@
                     <a:lstStyle/>
                     <a:p>
                       <a:r>
-                        <a:rPr sz="1100" b="0">
+                        <a:rPr sz="1050" b="0">
                           <a:solidFill>
                             <a:srgbClr val="FFFFFF"/>
                           </a:solidFill>
@@ -17766,7 +17766,7 @@
                     <a:lstStyle/>
                     <a:p>
                       <a:r>
-                        <a:rPr sz="1100" b="0">
+                        <a:rPr sz="1050" b="0">
                           <a:solidFill>
                             <a:srgbClr val="181818"/>
                           </a:solidFill>
@@ -17788,7 +17788,7 @@
                     <a:lstStyle/>
                     <a:p>
                       <a:r>
-                        <a:rPr sz="1100" b="0">
+                        <a:rPr sz="1050" b="0">
                           <a:solidFill>
                             <a:srgbClr val="181818"/>
                           </a:solidFill>
@@ -17810,7 +17810,7 @@
                     <a:lstStyle/>
                     <a:p>
                       <a:r>
-                        <a:rPr sz="1100" b="0">
+                        <a:rPr sz="1050" b="0">
                           <a:solidFill>
                             <a:srgbClr val="181818"/>
                           </a:solidFill>
@@ -17834,7 +17834,7 @@
                     <a:lstStyle/>
                     <a:p>
                       <a:r>
-                        <a:rPr sz="1100" b="0">
+                        <a:rPr sz="1050" b="0">
                           <a:solidFill>
                             <a:srgbClr val="181818"/>
                           </a:solidFill>
@@ -17856,7 +17856,7 @@
                     <a:lstStyle/>
                     <a:p>
                       <a:r>
-                        <a:rPr sz="1100" b="0">
+                        <a:rPr sz="1050" b="0">
                           <a:solidFill>
                             <a:srgbClr val="181818"/>
                           </a:solidFill>
@@ -17878,7 +17878,7 @@
                     <a:lstStyle/>
                     <a:p>
                       <a:r>
-                        <a:rPr sz="1100" b="0">
+                        <a:rPr sz="1050" b="0">
                           <a:solidFill>
                             <a:srgbClr val="181818"/>
                           </a:solidFill>
@@ -17907,7 +17907,7 @@
                     <a:lstStyle/>
                     <a:p>
                       <a:r>
-                        <a:rPr sz="1100" b="0">
+                        <a:rPr sz="1050" b="0">
                           <a:solidFill>
                             <a:srgbClr val="181818"/>
                           </a:solidFill>
@@ -17929,7 +17929,7 @@
                     <a:lstStyle/>
                     <a:p>
                       <a:r>
-                        <a:rPr sz="1100" b="0">
+                        <a:rPr sz="1050" b="0">
                           <a:solidFill>
                             <a:srgbClr val="181818"/>
                           </a:solidFill>
@@ -17956,7 +17956,7 @@
                     <a:lstStyle/>
                     <a:p>
                       <a:r>
-                        <a:rPr sz="1100" b="0">
+                        <a:rPr sz="1050" b="0">
                           <a:solidFill>
                             <a:srgbClr val="181818"/>
                           </a:solidFill>
@@ -17980,7 +17980,7 @@
                     <a:lstStyle/>
                     <a:p>
                       <a:r>
-                        <a:rPr sz="1100" b="0">
+                        <a:rPr sz="1050" b="0">
                           <a:solidFill>
                             <a:srgbClr val="181818"/>
                           </a:solidFill>
@@ -18002,7 +18002,7 @@
                     <a:lstStyle/>
                     <a:p>
                       <a:r>
-                        <a:rPr sz="1100" b="0">
+                        <a:rPr sz="1050" b="0">
                           <a:solidFill>
                             <a:srgbClr val="181818"/>
                           </a:solidFill>
@@ -18024,7 +18024,7 @@
                     <a:lstStyle/>
                     <a:p>
                       <a:r>
-                        <a:rPr sz="1100" b="0">
+                        <a:rPr sz="1050" b="0">
                           <a:solidFill>
                             <a:srgbClr val="181818"/>
                           </a:solidFill>
@@ -18938,7 +18938,7 @@
                     <a:lstStyle/>
                     <a:p>
                       <a:r>
-                        <a:rPr sz="1100" b="0">
+                        <a:rPr sz="1050" b="0">
                           <a:solidFill>
                             <a:srgbClr val="FFFFFF"/>
                           </a:solidFill>
@@ -18960,7 +18960,7 @@
                     <a:lstStyle/>
                     <a:p>
                       <a:r>
-                        <a:rPr sz="1100" b="0">
+                        <a:rPr sz="1050" b="0">
                           <a:solidFill>
                             <a:srgbClr val="FFFFFF"/>
                           </a:solidFill>
@@ -18982,7 +18982,7 @@
                     <a:lstStyle/>
                     <a:p>
                       <a:r>
-                        <a:rPr sz="1100" b="0">
+                        <a:rPr sz="1050" b="0">
                           <a:solidFill>
                             <a:srgbClr val="FFFFFF"/>
                           </a:solidFill>
@@ -19004,7 +19004,7 @@
                     <a:lstStyle/>
                     <a:p>
                       <a:r>
-                        <a:rPr sz="1100" b="0">
+                        <a:rPr sz="1050" b="0">
                           <a:solidFill>
                             <a:srgbClr val="FFFFFF"/>
                           </a:solidFill>
@@ -19028,7 +19028,7 @@
                     <a:lstStyle/>
                     <a:p>
                       <a:r>
-                        <a:rPr sz="1100" b="0">
+                        <a:rPr sz="1050" b="0">
                           <a:solidFill>
                             <a:srgbClr val="181818"/>
                           </a:solidFill>
@@ -19050,7 +19050,7 @@
                     <a:lstStyle/>
                     <a:p>
                       <a:r>
-                        <a:rPr sz="1100" b="0">
+                        <a:rPr sz="1050" b="0">
                           <a:solidFill>
                             <a:srgbClr val="181818"/>
                           </a:solidFill>
@@ -19072,7 +19072,7 @@
                     <a:lstStyle/>
                     <a:p>
                       <a:r>
-                        <a:rPr sz="1100" b="0">
+                        <a:rPr sz="1050" b="0">
                           <a:solidFill>
                             <a:srgbClr val="181818"/>
                           </a:solidFill>
@@ -19094,7 +19094,7 @@
                     <a:lstStyle/>
                     <a:p>
                       <a:r>
-                        <a:rPr sz="1100" b="0">
+                        <a:rPr sz="1050" b="0">
                           <a:solidFill>
                             <a:srgbClr val="181818"/>
                           </a:solidFill>
@@ -19118,7 +19118,7 @@
                     <a:lstStyle/>
                     <a:p>
                       <a:r>
-                        <a:rPr sz="1100" b="0">
+                        <a:rPr sz="1050" b="0">
                           <a:solidFill>
                             <a:srgbClr val="181818"/>
                           </a:solidFill>
@@ -19140,7 +19140,7 @@
                     <a:lstStyle/>
                     <a:p>
                       <a:r>
-                        <a:rPr sz="1100" b="0">
+                        <a:rPr sz="1050" b="0">
                           <a:solidFill>
                             <a:srgbClr val="181818"/>
                           </a:solidFill>
@@ -19162,7 +19162,7 @@
                     <a:lstStyle/>
                     <a:p>
                       <a:r>
-                        <a:rPr sz="1100" b="0">
+                        <a:rPr sz="1050" b="0">
                           <a:solidFill>
                             <a:srgbClr val="181818"/>
                           </a:solidFill>
@@ -19184,7 +19184,7 @@
                     <a:lstStyle/>
                     <a:p>
                       <a:r>
-                        <a:rPr sz="1100" b="0">
+                        <a:rPr sz="1050" b="0">
                           <a:solidFill>
                             <a:srgbClr val="181818"/>
                           </a:solidFill>
@@ -19208,7 +19208,7 @@
                     <a:lstStyle/>
                     <a:p>
                       <a:r>
-                        <a:rPr sz="1100" b="0">
+                        <a:rPr sz="1050" b="0">
                           <a:solidFill>
                             <a:srgbClr val="181818"/>
                           </a:solidFill>
@@ -19230,7 +19230,7 @@
                     <a:lstStyle/>
                     <a:p>
                       <a:r>
-                        <a:rPr sz="1100" b="0">
+                        <a:rPr sz="1050" b="0">
                           <a:solidFill>
                             <a:srgbClr val="181818"/>
                           </a:solidFill>
@@ -19252,7 +19252,7 @@
                     <a:lstStyle/>
                     <a:p>
                       <a:r>
-                        <a:rPr sz="1100" b="0">
+                        <a:rPr sz="1050" b="0">
                           <a:solidFill>
                             <a:srgbClr val="181818"/>
                           </a:solidFill>
@@ -19274,7 +19274,7 @@
                     <a:lstStyle/>
                     <a:p>
                       <a:r>
-                        <a:rPr sz="1100" b="0">
+                        <a:rPr sz="1050" b="0">
                           <a:solidFill>
                             <a:srgbClr val="181818"/>
                           </a:solidFill>
@@ -19298,7 +19298,7 @@
                     <a:lstStyle/>
                     <a:p>
                       <a:r>
-                        <a:rPr sz="1100" b="0">
+                        <a:rPr sz="1050" b="0">
                           <a:solidFill>
                             <a:srgbClr val="181818"/>
                           </a:solidFill>
@@ -19320,7 +19320,7 @@
                     <a:lstStyle/>
                     <a:p>
                       <a:r>
-                        <a:rPr sz="1100" b="0">
+                        <a:rPr sz="1050" b="0">
                           <a:solidFill>
                             <a:srgbClr val="181818"/>
                           </a:solidFill>
@@ -19342,7 +19342,7 @@
                     <a:lstStyle/>
                     <a:p>
                       <a:r>
-                        <a:rPr sz="1100" b="0">
+                        <a:rPr sz="1050" b="0">
                           <a:solidFill>
                             <a:srgbClr val="181818"/>
                           </a:solidFill>
@@ -19364,7 +19364,7 @@
                     <a:lstStyle/>
                     <a:p>
                       <a:r>
-                        <a:rPr sz="1100" b="0">
+                        <a:rPr sz="1050" b="0">
                           <a:solidFill>
                             <a:srgbClr val="181818"/>
                           </a:solidFill>
@@ -19388,7 +19388,7 @@
                     <a:lstStyle/>
                     <a:p>
                       <a:r>
-                        <a:rPr sz="1100" b="0">
+                        <a:rPr sz="1050" b="0">
                           <a:solidFill>
                             <a:srgbClr val="181818"/>
                           </a:solidFill>
@@ -19410,7 +19410,7 @@
                     <a:lstStyle/>
                     <a:p>
                       <a:r>
-                        <a:rPr sz="1100" b="0">
+                        <a:rPr sz="1050" b="0">
                           <a:solidFill>
                             <a:srgbClr val="181818"/>
                           </a:solidFill>
@@ -19432,7 +19432,7 @@
                     <a:lstStyle/>
                     <a:p>
                       <a:r>
-                        <a:rPr sz="1100" b="0">
+                        <a:rPr sz="1050" b="0">
                           <a:solidFill>
                             <a:srgbClr val="181818"/>
                           </a:solidFill>
@@ -19454,7 +19454,7 @@
                     <a:lstStyle/>
                     <a:p>
                       <a:r>
-                        <a:rPr sz="1100" b="0">
+                        <a:rPr sz="1050" b="0">
                           <a:solidFill>
                             <a:srgbClr val="181818"/>
                           </a:solidFill>

--- a/Саратовская_область_презентация_СПбГУ.pptx
+++ b/Саратовская_область_презентация_СПбГУ.pptx
@@ -240,7 +240,7 @@
           </c:val>
         </c:ser>
         <c:dLbls>
-          <c:numFmt formatCode="0.0&quot;%&quot;" sourceLinked="0"/>
+          <c:numFmt formatCode="0,0&quot;%&quot;" sourceLinked="0"/>
           <c:txPr>
             <a:bodyPr/>
             <a:lstStyle/>
@@ -379,7 +379,7 @@
           </c:val>
         </c:ser>
         <c:dLbls>
-          <c:numFmt formatCode="0.0&quot;%&quot;" sourceLinked="0"/>
+          <c:numFmt formatCode="0,0&quot;%&quot;" sourceLinked="0"/>
           <c:txPr>
             <a:bodyPr/>
             <a:lstStyle/>
@@ -9300,7 +9300,7 @@
         </p:nvSpPr>
         <p:spPr>
           <a:xfrm>
-            <a:off x="1481328" y="5029200"/>
+            <a:off x="1481328" y="5257800"/>
             <a:ext cx="10332720" cy="411480"/>
           </a:xfrm>
           <a:prstGeom prst="rect">
@@ -11017,7 +11017,7 @@
           </a:bodyPr>
           <a:lstStyle/>
           <a:p>
-            <a:pPr>
+            <a:pPr marL="219456" indent="-219456">
               <a:spcAft>
                 <a:spcPts val="800"/>
               </a:spcAft>
@@ -11033,7 +11033,7 @@
             </a:r>
           </a:p>
           <a:p>
-            <a:pPr>
+            <a:pPr marL="219456" indent="-219456">
               <a:spcAft>
                 <a:spcPts val="800"/>
               </a:spcAft>
@@ -11049,7 +11049,7 @@
             </a:r>
           </a:p>
           <a:p>
-            <a:pPr>
+            <a:pPr marL="219456" indent="-219456">
               <a:spcAft>
                 <a:spcPts val="800"/>
               </a:spcAft>
@@ -11065,7 +11065,7 @@
             </a:r>
           </a:p>
           <a:p>
-            <a:pPr>
+            <a:pPr marL="219456" indent="-219456">
               <a:spcAft>
                 <a:spcPts val="800"/>
               </a:spcAft>
@@ -11081,7 +11081,7 @@
             </a:r>
           </a:p>
           <a:p>
-            <a:pPr>
+            <a:pPr marL="219456" indent="-219456">
               <a:spcAft>
                 <a:spcPts val="800"/>
               </a:spcAft>
@@ -12217,8 +12217,8 @@
         </p:nvSpPr>
         <p:spPr>
           <a:xfrm>
-            <a:off x="640080" y="1993392"/>
-            <a:ext cx="2471166" cy="457200"/>
+            <a:off x="612648" y="1993392"/>
+            <a:ext cx="2526030" cy="457200"/>
           </a:xfrm>
           <a:prstGeom prst="rect">
             <a:avLst/>
@@ -12357,8 +12357,8 @@
         </p:nvSpPr>
         <p:spPr>
           <a:xfrm>
-            <a:off x="3440430" y="1993392"/>
-            <a:ext cx="2471166" cy="457200"/>
+            <a:off x="3412998" y="1993392"/>
+            <a:ext cx="2526030" cy="457200"/>
           </a:xfrm>
           <a:prstGeom prst="rect">
             <a:avLst/>
@@ -12399,7 +12399,7 @@
                 </a:solidFill>
                 <a:latin typeface="Open Sans"/>
               </a:rPr>
-              <a:t>предлагаемой</a:t>
+              <a:t>зарплаты</a:t>
             </a:r>
           </a:p>
         </p:txBody>
@@ -12497,8 +12497,8 @@
         </p:nvSpPr>
         <p:spPr>
           <a:xfrm>
-            <a:off x="6240780" y="1993392"/>
-            <a:ext cx="2471166" cy="457200"/>
+            <a:off x="6213348" y="1993392"/>
+            <a:ext cx="2526030" cy="457200"/>
           </a:xfrm>
           <a:prstGeom prst="rect">
             <a:avLst/>
@@ -12637,8 +12637,8 @@
         </p:nvSpPr>
         <p:spPr>
           <a:xfrm>
-            <a:off x="9041130" y="1993392"/>
-            <a:ext cx="2471166" cy="457200"/>
+            <a:off x="9013698" y="1993392"/>
+            <a:ext cx="2526030" cy="457200"/>
           </a:xfrm>
           <a:prstGeom prst="rect">
             <a:avLst/>
@@ -12693,7 +12693,7 @@
         <p:spPr>
           <a:xfrm>
             <a:off x="566928" y="2560320"/>
-            <a:ext cx="11018520" cy="548640"/>
+            <a:ext cx="11018520" cy="502920"/>
           </a:xfrm>
           <a:prstGeom prst="rect">
             <a:avLst/>
@@ -12718,7 +12718,23 @@
                 </a:solidFill>
                 <a:latin typeface="Open Sans"/>
               </a:rPr>
-              <a:t>Распределение предлагаемых зарплат:  13 000 ₽ минимум  ·  28 500 ₽ 1-й квартиль  ·  38 000 ₽ медиана  ·  45 349 ₽ средняя  ·  50 000 ₽ 3-й квартиль  ·  275 000 ₽ максимум</a:t>
+              <a:t>Предлагаемые зарплаты, ₽:  минимум 13 000  ·  1-й квартиль 28 500  ·  медиана 38 000</a:t>
+            </a:r>
+          </a:p>
+          <a:p>
+            <a:pPr algn="l">
+              <a:lnSpc>
+                <a:spcPct val="125000"/>
+              </a:lnSpc>
+            </a:pPr>
+            <a:r>
+              <a:rPr sz="1100" b="0">
+                <a:solidFill>
+                  <a:srgbClr val="181818"/>
+                </a:solidFill>
+                <a:latin typeface="Open Sans"/>
+              </a:rPr>
+              <a:t>средняя 45 349  ·  3-й квартиль 50 000  ·  максимум 275 000</a:t>
             </a:r>
           </a:p>
         </p:txBody>
@@ -12731,7 +12747,7 @@
         </p:nvSpPr>
         <p:spPr>
           <a:xfrm>
-            <a:off x="566928" y="2971800"/>
+            <a:off x="566928" y="3108960"/>
             <a:ext cx="11018520" cy="320040"/>
           </a:xfrm>
           <a:prstGeom prst="rect">
@@ -12771,7 +12787,7 @@
           <p:nvPr/>
         </p:nvGraphicFramePr>
         <p:xfrm>
-          <a:off x="566928" y="3310128"/>
+          <a:off x="566928" y="3456432"/>
           <a:ext cx="10577778" cy="1865376"/>
         </p:xfrm>
         <a:graphic>
@@ -13604,7 +13620,7 @@
         </p:nvSpPr>
         <p:spPr>
           <a:xfrm>
-            <a:off x="566928" y="5669280"/>
+            <a:off x="566928" y="5623560"/>
             <a:ext cx="11018520" cy="4754880"/>
           </a:xfrm>
           <a:prstGeom prst="rect">
@@ -13618,7 +13634,7 @@
           </a:bodyPr>
           <a:lstStyle/>
           <a:p>
-            <a:pPr>
+            <a:pPr marL="219456" indent="-219456">
               <a:spcAft>
                 <a:spcPts val="500"/>
               </a:spcAft>
@@ -13634,7 +13650,7 @@
             </a:r>
           </a:p>
           <a:p>
-            <a:pPr>
+            <a:pPr marL="219456" indent="-219456">
               <a:spcAft>
                 <a:spcPts val="500"/>
               </a:spcAft>
@@ -15238,7 +15254,7 @@
           </a:bodyPr>
           <a:lstStyle/>
           <a:p>
-            <a:pPr>
+            <a:pPr marL="219456" indent="-219456">
               <a:spcAft>
                 <a:spcPts val="700"/>
               </a:spcAft>
@@ -15254,7 +15270,7 @@
             </a:r>
           </a:p>
           <a:p>
-            <a:pPr>
+            <a:pPr marL="219456" indent="-219456">
               <a:spcAft>
                 <a:spcPts val="700"/>
               </a:spcAft>
@@ -15270,7 +15286,7 @@
             </a:r>
           </a:p>
           <a:p>
-            <a:pPr>
+            <a:pPr marL="219456" indent="-219456">
               <a:spcAft>
                 <a:spcPts val="700"/>
               </a:spcAft>
@@ -15286,7 +15302,7 @@
             </a:r>
           </a:p>
           <a:p>
-            <a:pPr>
+            <a:pPr marL="219456" indent="-219456">
               <a:spcAft>
                 <a:spcPts val="700"/>
               </a:spcAft>
@@ -15481,7 +15497,7 @@
           </a:bodyPr>
           <a:lstStyle/>
           <a:p>
-            <a:pPr>
+            <a:pPr marL="219456" indent="-219456">
               <a:spcAft>
                 <a:spcPts val="800"/>
               </a:spcAft>
@@ -15497,7 +15513,7 @@
             </a:r>
           </a:p>
           <a:p>
-            <a:pPr>
+            <a:pPr marL="219456" indent="-219456">
               <a:spcAft>
                 <a:spcPts val="800"/>
               </a:spcAft>
@@ -15513,7 +15529,7 @@
             </a:r>
           </a:p>
           <a:p>
-            <a:pPr>
+            <a:pPr marL="219456" indent="-219456">
               <a:spcAft>
                 <a:spcPts val="800"/>
               </a:spcAft>
@@ -15529,7 +15545,7 @@
             </a:r>
           </a:p>
           <a:p>
-            <a:pPr>
+            <a:pPr marL="219456" indent="-219456">
               <a:spcAft>
                 <a:spcPts val="800"/>
               </a:spcAft>
@@ -15545,7 +15561,7 @@
             </a:r>
           </a:p>
           <a:p>
-            <a:pPr>
+            <a:pPr marL="219456" indent="-219456">
               <a:spcAft>
                 <a:spcPts val="800"/>
               </a:spcAft>
@@ -15561,7 +15577,7 @@
             </a:r>
           </a:p>
           <a:p>
-            <a:pPr>
+            <a:pPr marL="219456" indent="-219456">
               <a:spcAft>
                 <a:spcPts val="800"/>
               </a:spcAft>
@@ -15577,7 +15593,7 @@
             </a:r>
           </a:p>
           <a:p>
-            <a:pPr>
+            <a:pPr marL="219456" indent="-219456">
               <a:spcAft>
                 <a:spcPts val="800"/>
               </a:spcAft>
@@ -15593,7 +15609,7 @@
             </a:r>
           </a:p>
           <a:p>
-            <a:pPr>
+            <a:pPr marL="219456" indent="-219456">
               <a:spcAft>
                 <a:spcPts val="800"/>
               </a:spcAft>
@@ -15881,11 +15897,23 @@
                     </a:p>
                     <a:p>
                       <a:r>
+                        <a:rPr sz="1050" b="0">
+                          <a:solidFill>
+                            <a:srgbClr val="181818"/>
+                          </a:solidFill>
+                          <a:latin typeface="Open Sans"/>
+                        </a:rPr>
                         <a:t>rosstat_docx_to_text</a:t>
                       </a:r>
                     </a:p>
                     <a:p>
                       <a:r>
+                        <a:rPr sz="1050" b="0">
+                          <a:solidFill>
+                            <a:srgbClr val="181818"/>
+                          </a:solidFill>
+                          <a:latin typeface="Open Sans"/>
+                        </a:rPr>
                         <a:t>rosstat_extract_region</a:t>
                       </a:r>
                     </a:p>
@@ -16071,6 +16099,12 @@
                     </a:p>
                     <a:p>
                       <a:r>
+                        <a:rPr sz="1050" b="0">
+                          <a:solidFill>
+                            <a:srgbClr val="181818"/>
+                          </a:solidFill>
+                          <a:latin typeface="Open Sans"/>
+                        </a:rPr>
                         <a:t>parse_osm_objects</a:t>
                       </a:r>
                     </a:p>
@@ -16166,6 +16200,12 @@
                     </a:p>
                     <a:p>
                       <a:r>
+                        <a:rPr sz="1050" b="0">
+                          <a:solidFill>
+                            <a:srgbClr val="181818"/>
+                          </a:solidFill>
+                          <a:latin typeface="Open Sans"/>
+                        </a:rPr>
                         <a:t>assign_cities</a:t>
                       </a:r>
                     </a:p>
@@ -16215,6 +16255,12 @@
                     </a:p>
                     <a:p>
                       <a:r>
+                        <a:rPr sz="1050" b="0">
+                          <a:solidFill>
+                            <a:srgbClr val="181818"/>
+                          </a:solidFill>
+                          <a:latin typeface="Open Sans"/>
+                        </a:rPr>
                         <a:t>objects_by_city.csv</a:t>
                       </a:r>
                     </a:p>
@@ -17108,7 +17154,7 @@
           </a:bodyPr>
           <a:lstStyle/>
           <a:p>
-            <a:pPr>
+            <a:pPr marL="219456" indent="-219456">
               <a:spcAft>
                 <a:spcPts val="800"/>
               </a:spcAft>
@@ -17124,7 +17170,7 @@
             </a:r>
           </a:p>
           <a:p>
-            <a:pPr>
+            <a:pPr marL="219456" indent="-219456">
               <a:spcAft>
                 <a:spcPts val="800"/>
               </a:spcAft>
@@ -17140,7 +17186,7 @@
             </a:r>
           </a:p>
           <a:p>
-            <a:pPr>
+            <a:pPr marL="219456" indent="-219456">
               <a:spcAft>
                 <a:spcPts val="800"/>
               </a:spcAft>
@@ -17156,7 +17202,7 @@
             </a:r>
           </a:p>
           <a:p>
-            <a:pPr>
+            <a:pPr marL="219456" indent="-219456">
               <a:spcAft>
                 <a:spcPts val="800"/>
               </a:spcAft>
@@ -17172,7 +17218,7 @@
             </a:r>
           </a:p>
           <a:p>
-            <a:pPr>
+            <a:pPr marL="219456" indent="-219456">
               <a:spcAft>
                 <a:spcPts val="800"/>
               </a:spcAft>
@@ -17463,7 +17509,7 @@
           </a:bodyPr>
           <a:lstStyle/>
           <a:p>
-            <a:pPr>
+            <a:pPr marL="219456" indent="-219456">
               <a:spcAft>
                 <a:spcPts val="600"/>
               </a:spcAft>
@@ -17479,7 +17525,7 @@
             </a:r>
           </a:p>
           <a:p>
-            <a:pPr>
+            <a:pPr marL="219456" indent="-219456">
               <a:spcAft>
                 <a:spcPts val="600"/>
               </a:spcAft>
@@ -17495,7 +17541,7 @@
             </a:r>
           </a:p>
           <a:p>
-            <a:pPr>
+            <a:pPr marL="219456" indent="-219456">
               <a:spcAft>
                 <a:spcPts val="600"/>
               </a:spcAft>
@@ -17889,6 +17935,12 @@
                     </a:p>
                     <a:p>
                       <a:r>
+                        <a:rPr sz="1050" b="0">
+                          <a:solidFill>
+                            <a:srgbClr val="181818"/>
+                          </a:solidFill>
+                          <a:latin typeface="Open Sans"/>
+                        </a:rPr>
                         <a:t>11 млн линий</a:t>
                       </a:r>
                     </a:p>
@@ -17940,6 +17992,12 @@
                     </a:p>
                     <a:p>
                       <a:r>
+                        <a:rPr sz="1050" b="0">
+                          <a:solidFill>
+                            <a:srgbClr val="181818"/>
+                          </a:solidFill>
+                          <a:latin typeface="Open Sans"/>
+                        </a:rPr>
                         <a:t>shop=beauty|hairdresser|massage;  leisure=tanning_salon</a:t>
                       </a:r>
                     </a:p>
@@ -18592,7 +18650,7 @@
           </a:bodyPr>
           <a:lstStyle/>
           <a:p>
-            <a:pPr>
+            <a:pPr marL="219456" indent="-219456">
               <a:spcAft>
                 <a:spcPts val="700"/>
               </a:spcAft>
@@ -18608,7 +18666,7 @@
             </a:r>
           </a:p>
           <a:p>
-            <a:pPr>
+            <a:pPr marL="219456" indent="-219456">
               <a:spcAft>
                 <a:spcPts val="700"/>
               </a:spcAft>
@@ -18624,7 +18682,7 @@
             </a:r>
           </a:p>
           <a:p>
-            <a:pPr>
+            <a:pPr marL="219456" indent="-219456">
               <a:spcAft>
                 <a:spcPts val="700"/>
               </a:spcAft>
@@ -18702,7 +18760,7 @@
           </a:bodyPr>
           <a:lstStyle/>
           <a:p>
-            <a:pPr>
+            <a:pPr marL="219456" indent="-219456">
               <a:spcAft>
                 <a:spcPts val="500"/>
               </a:spcAft>
@@ -18718,7 +18776,7 @@
             </a:r>
           </a:p>
           <a:p>
-            <a:pPr>
+            <a:pPr marL="219456" indent="-219456">
               <a:spcAft>
                 <a:spcPts val="500"/>
               </a:spcAft>
@@ -18734,7 +18792,7 @@
             </a:r>
           </a:p>
           <a:p>
-            <a:pPr>
+            <a:pPr marL="219456" indent="-219456">
               <a:spcAft>
                 <a:spcPts val="500"/>
               </a:spcAft>
@@ -19757,7 +19815,7 @@
         <p:spPr>
           <a:xfrm>
             <a:off x="566928" y="1737360"/>
-            <a:ext cx="5394960" cy="2194560"/>
+            <a:ext cx="5394960" cy="1783080"/>
           </a:xfrm>
           <a:prstGeom prst="roundRect">
             <a:avLst>
@@ -19803,7 +19861,7 @@
         <p:spPr>
           <a:xfrm>
             <a:off x="704088" y="1828800"/>
-            <a:ext cx="5120640" cy="2011679"/>
+            <a:ext cx="5120640" cy="1600200"/>
           </a:xfrm>
           <a:prstGeom prst="rect">
             <a:avLst/>
@@ -19860,7 +19918,7 @@
                 </a:solidFill>
                 <a:latin typeface="Open Sans"/>
               </a:rPr>
-              <a:t>pop  = rv.require(t, "1.1", label="Численность населения")</a:t>
+              <a:t>pop  = rv.require(t, "1.1", label="Численность")</a:t>
             </a:r>
           </a:p>
           <a:p>
@@ -19876,7 +19934,7 @@
                 </a:solidFill>
                 <a:latin typeface="Open Sans"/>
               </a:rPr>
-              <a:t>grp  = rv.require(t, "1.1", label="Валовой региональный продукт")</a:t>
+              <a:t>grp  = rv.require(t, "1.1", label="Валовой продукт")</a:t>
             </a:r>
           </a:p>
           <a:p>
@@ -19921,7 +19979,7 @@
         </p:nvSpPr>
         <p:spPr>
           <a:xfrm>
-            <a:off x="566928" y="4069080"/>
+            <a:off x="566928" y="3931920"/>
             <a:ext cx="5394960" cy="822960"/>
           </a:xfrm>
           <a:prstGeom prst="rect">
@@ -19941,7 +19999,7 @@
               </a:lnSpc>
             </a:pPr>
             <a:r>
-              <a:rPr sz="1100" b="0">
+              <a:rPr sz="1150" b="0">
                 <a:solidFill>
                   <a:srgbClr val="181818"/>
                 </a:solidFill>
@@ -20045,8 +20103,8 @@
         </p:nvSpPr>
         <p:spPr>
           <a:xfrm>
-            <a:off x="6336792" y="2039112"/>
-            <a:ext cx="1046988" cy="457200"/>
+            <a:off x="6309359" y="2039112"/>
+            <a:ext cx="1101852" cy="457200"/>
           </a:xfrm>
           <a:prstGeom prst="rect">
             <a:avLst/>
@@ -20065,7 +20123,7 @@
               </a:lnSpc>
             </a:pPr>
             <a:r>
-              <a:rPr sz="1050" b="0">
+              <a:rPr sz="900" b="0">
                 <a:solidFill>
                   <a:srgbClr val="595959"/>
                 </a:solidFill>
@@ -20081,7 +20139,7 @@
               </a:lnSpc>
             </a:pPr>
             <a:r>
-              <a:rPr sz="1050" b="0">
+              <a:rPr sz="900" b="0">
                 <a:solidFill>
                   <a:srgbClr val="595959"/>
                 </a:solidFill>
@@ -20185,8 +20243,8 @@
         </p:nvSpPr>
         <p:spPr>
           <a:xfrm>
-            <a:off x="7712964" y="2039112"/>
-            <a:ext cx="1046988" cy="457200"/>
+            <a:off x="7685532" y="2039112"/>
+            <a:ext cx="1101852" cy="457200"/>
           </a:xfrm>
           <a:prstGeom prst="rect">
             <a:avLst/>
@@ -20205,7 +20263,7 @@
               </a:lnSpc>
             </a:pPr>
             <a:r>
-              <a:rPr sz="1050" b="0">
+              <a:rPr sz="900" b="0">
                 <a:solidFill>
                   <a:srgbClr val="595959"/>
                 </a:solidFill>
@@ -20221,7 +20279,7 @@
               </a:lnSpc>
             </a:pPr>
             <a:r>
-              <a:rPr sz="1050" b="0">
+              <a:rPr sz="900" b="0">
                 <a:solidFill>
                   <a:srgbClr val="595959"/>
                 </a:solidFill>
@@ -20325,8 +20383,8 @@
         </p:nvSpPr>
         <p:spPr>
           <a:xfrm>
-            <a:off x="9089136" y="2039112"/>
-            <a:ext cx="1046988" cy="457200"/>
+            <a:off x="9061704" y="2039112"/>
+            <a:ext cx="1101852" cy="457200"/>
           </a:xfrm>
           <a:prstGeom prst="rect">
             <a:avLst/>
@@ -20345,7 +20403,7 @@
               </a:lnSpc>
             </a:pPr>
             <a:r>
-              <a:rPr sz="1050" b="0">
+              <a:rPr sz="900" b="0">
                 <a:solidFill>
                   <a:srgbClr val="595959"/>
                 </a:solidFill>
@@ -20361,7 +20419,7 @@
               </a:lnSpc>
             </a:pPr>
             <a:r>
-              <a:rPr sz="1050" b="0">
+              <a:rPr sz="900" b="0">
                 <a:solidFill>
                   <a:srgbClr val="595959"/>
                 </a:solidFill>
@@ -20465,8 +20523,8 @@
         </p:nvSpPr>
         <p:spPr>
           <a:xfrm>
-            <a:off x="10465308" y="2039112"/>
-            <a:ext cx="1046988" cy="457200"/>
+            <a:off x="10437876" y="2039112"/>
+            <a:ext cx="1101852" cy="457200"/>
           </a:xfrm>
           <a:prstGeom prst="rect">
             <a:avLst/>
@@ -20485,7 +20543,7 @@
               </a:lnSpc>
             </a:pPr>
             <a:r>
-              <a:rPr sz="1050" b="0">
+              <a:rPr sz="900" b="0">
                 <a:solidFill>
                   <a:srgbClr val="595959"/>
                 </a:solidFill>
@@ -20501,7 +20559,7 @@
               </a:lnSpc>
             </a:pPr>
             <a:r>
-              <a:rPr sz="1050" b="0">
+              <a:rPr sz="900" b="0">
                 <a:solidFill>
                   <a:srgbClr val="595959"/>
                 </a:solidFill>
@@ -20605,8 +20663,8 @@
         </p:nvSpPr>
         <p:spPr>
           <a:xfrm>
-            <a:off x="6336792" y="3227832"/>
-            <a:ext cx="1046988" cy="457200"/>
+            <a:off x="6309359" y="3227832"/>
+            <a:ext cx="1101852" cy="457200"/>
           </a:xfrm>
           <a:prstGeom prst="rect">
             <a:avLst/>
@@ -20625,7 +20683,7 @@
               </a:lnSpc>
             </a:pPr>
             <a:r>
-              <a:rPr sz="1050" b="0">
+              <a:rPr sz="900" b="0">
                 <a:solidFill>
                   <a:srgbClr val="595959"/>
                 </a:solidFill>
@@ -20729,8 +20787,8 @@
         </p:nvSpPr>
         <p:spPr>
           <a:xfrm>
-            <a:off x="7712964" y="3227832"/>
-            <a:ext cx="1046988" cy="457200"/>
+            <a:off x="7685532" y="3227832"/>
+            <a:ext cx="1101852" cy="457200"/>
           </a:xfrm>
           <a:prstGeom prst="rect">
             <a:avLst/>
@@ -20749,7 +20807,7 @@
               </a:lnSpc>
             </a:pPr>
             <a:r>
-              <a:rPr sz="1050" b="0">
+              <a:rPr sz="900" b="0">
                 <a:solidFill>
                   <a:srgbClr val="595959"/>
                 </a:solidFill>
@@ -20853,8 +20911,8 @@
         </p:nvSpPr>
         <p:spPr>
           <a:xfrm>
-            <a:off x="9089136" y="3227832"/>
-            <a:ext cx="1046988" cy="457200"/>
+            <a:off x="9061704" y="3227832"/>
+            <a:ext cx="1101852" cy="457200"/>
           </a:xfrm>
           <a:prstGeom prst="rect">
             <a:avLst/>
@@ -20873,7 +20931,7 @@
               </a:lnSpc>
             </a:pPr>
             <a:r>
-              <a:rPr sz="1050" b="0">
+              <a:rPr sz="900" b="0">
                 <a:solidFill>
                   <a:srgbClr val="595959"/>
                 </a:solidFill>
@@ -20977,8 +21035,8 @@
         </p:nvSpPr>
         <p:spPr>
           <a:xfrm>
-            <a:off x="10465308" y="3227832"/>
-            <a:ext cx="1046988" cy="457200"/>
+            <a:off x="10437876" y="3227832"/>
+            <a:ext cx="1101852" cy="457200"/>
           </a:xfrm>
           <a:prstGeom prst="rect">
             <a:avLst/>
@@ -20997,7 +21055,7 @@
               </a:lnSpc>
             </a:pPr>
             <a:r>
-              <a:rPr sz="1050" b="0">
+              <a:rPr sz="900" b="0">
                 <a:solidFill>
                   <a:srgbClr val="595959"/>
                 </a:solidFill>
@@ -21013,7 +21071,7 @@
               </a:lnSpc>
             </a:pPr>
             <a:r>
-              <a:rPr sz="1050" b="0">
+              <a:rPr sz="900" b="0">
                 <a:solidFill>
                   <a:srgbClr val="595959"/>
                 </a:solidFill>
@@ -21046,7 +21104,7 @@
           </a:bodyPr>
           <a:lstStyle/>
           <a:p>
-            <a:pPr>
+            <a:pPr marL="219456" indent="-219456">
               <a:spcAft>
                 <a:spcPts val="600"/>
               </a:spcAft>
@@ -21062,7 +21120,7 @@
             </a:r>
           </a:p>
           <a:p>
-            <a:pPr>
+            <a:pPr marL="219456" indent="-219456">
               <a:spcAft>
                 <a:spcPts val="600"/>
               </a:spcAft>
@@ -21078,7 +21136,7 @@
             </a:r>
           </a:p>
           <a:p>
-            <a:pPr>
+            <a:pPr marL="219456" indent="-219456">
               <a:spcAft>
                 <a:spcPts val="600"/>
               </a:spcAft>
@@ -21426,7 +21484,7 @@
           </a:bodyPr>
           <a:lstStyle/>
           <a:p>
-            <a:pPr>
+            <a:pPr marL="219456" indent="-219456">
               <a:spcAft>
                 <a:spcPts val="500"/>
               </a:spcAft>
@@ -21442,7 +21500,7 @@
             </a:r>
           </a:p>
           <a:p>
-            <a:pPr>
+            <a:pPr marL="219456" indent="-219456">
               <a:spcAft>
                 <a:spcPts val="500"/>
               </a:spcAft>
@@ -21458,7 +21516,7 @@
             </a:r>
           </a:p>
           <a:p>
-            <a:pPr>
+            <a:pPr marL="219456" indent="-219456">
               <a:spcAft>
                 <a:spcPts val="500"/>
               </a:spcAft>
@@ -21474,7 +21532,7 @@
             </a:r>
           </a:p>
           <a:p>
-            <a:pPr>
+            <a:pPr marL="219456" indent="-219456">
               <a:spcAft>
                 <a:spcPts val="500"/>
               </a:spcAft>
@@ -21490,7 +21548,7 @@
             </a:r>
           </a:p>
           <a:p>
-            <a:pPr>
+            <a:pPr marL="219456" indent="-219456">
               <a:spcAft>
                 <a:spcPts val="500"/>
               </a:spcAft>

--- a/Саратовская_область_презентация_СПбГУ.pptx
+++ b/Саратовская_область_презентация_СПбГУ.pptx
@@ -13397,7 +13397,7 @@
                           </a:solidFill>
                           <a:latin typeface="Open Sans"/>
                         </a:rPr>
-                        <a:t>45 200</a:t>
+                        <a:t>45 400</a:t>
                       </a:r>
                     </a:p>
                   </a:txBody>
